--- a/ips/영상처리시스템_CH03.pptx
+++ b/ips/영상처리시스템_CH03.pptx
@@ -5257,8 +5257,8 @@
         </p:blipFill>
         <p:spPr>
           <a:xfrm>
-            <a:off x="5334335" y="2664333"/>
-            <a:ext cx="7619330" cy="3888485"/>
+            <a:off x="5490204" y="2664333"/>
+            <a:ext cx="7307592" cy="3888486"/>
           </a:xfrm>
           <a:prstGeom prst="rect">
             <a:avLst/>
@@ -5620,7 +5620,7 @@
             <a:r>
               <a:rPr sz="2900" b="0">
                 <a:solidFill>
-                  <a:srgbClr val="003956"/>
+                  <a:srgbClr val="B05C22"/>
                 </a:solidFill>
                 <a:latin typeface="프리젠테이션 5 Medium"/>
                 <a:ea typeface="프리젠테이션 5 Medium"/>
@@ -5660,7 +5660,7 @@
             <a:r>
               <a:rPr sz="2900" b="0">
                 <a:solidFill>
-                  <a:srgbClr val="003956"/>
+                  <a:srgbClr val="B05C22"/>
                 </a:solidFill>
                 <a:latin typeface="프리젠테이션 5 Medium"/>
                 <a:ea typeface="프리젠테이션 5 Medium"/>
@@ -6870,7 +6870,7 @@
             <a:r>
               <a:rPr sz="2200" b="0">
                 <a:solidFill>
-                  <a:srgbClr val="003956"/>
+                  <a:srgbClr val="B05C22"/>
                 </a:solidFill>
                 <a:latin typeface="프리젠테이션 5 Medium"/>
                 <a:ea typeface="프리젠테이션 5 Medium"/>
@@ -6892,7 +6892,7 @@
             <a:r>
               <a:rPr sz="2200" b="0">
                 <a:solidFill>
-                  <a:srgbClr val="003956"/>
+                  <a:srgbClr val="B05C22"/>
                 </a:solidFill>
                 <a:latin typeface="프리젠테이션 5 Medium"/>
                 <a:ea typeface="프리젠테이션 5 Medium"/>
@@ -6910,7 +6910,7 @@
             <a:r>
               <a:rPr sz="2200" b="0">
                 <a:solidFill>
-                  <a:srgbClr val="003956"/>
+                  <a:srgbClr val="B05C22"/>
                 </a:solidFill>
                 <a:latin typeface="프리젠테이션 5 Medium"/>
                 <a:ea typeface="프리젠테이션 5 Medium"/>
@@ -7940,7 +7940,7 @@
             <a:r>
               <a:rPr sz="2900" b="0">
                 <a:solidFill>
-                  <a:srgbClr val="003956"/>
+                  <a:srgbClr val="B05C22"/>
                 </a:solidFill>
                 <a:latin typeface="프리젠테이션 5 Medium"/>
                 <a:ea typeface="프리젠테이션 5 Medium"/>
@@ -7987,7 +7987,7 @@
             <a:r>
               <a:rPr sz="2900" b="0">
                 <a:solidFill>
-                  <a:srgbClr val="003956"/>
+                  <a:srgbClr val="B05C22"/>
                 </a:solidFill>
                 <a:latin typeface="프리젠테이션 5 Medium"/>
                 <a:ea typeface="프리젠테이션 5 Medium"/>
@@ -8149,7 +8149,7 @@
             <a:r>
               <a:rPr sz="2000" b="0">
                 <a:solidFill>
-                  <a:srgbClr val="003956"/>
+                  <a:srgbClr val="B05C22"/>
                 </a:solidFill>
                 <a:latin typeface="프리젠테이션 5 Medium"/>
                 <a:ea typeface="프리젠테이션 5 Medium"/>
@@ -8734,7 +8734,7 @@
             <a:r>
               <a:rPr sz="3300" b="0">
                 <a:solidFill>
-                  <a:srgbClr val="003956"/>
+                  <a:srgbClr val="B05C22"/>
                 </a:solidFill>
                 <a:latin typeface="페이퍼로지 8 ExtraBold"/>
                 <a:ea typeface="페이퍼로지 8 ExtraBold"/>
@@ -9134,7 +9134,7 @@
             <a:r>
               <a:rPr sz="1700" b="0">
                 <a:solidFill>
-                  <a:srgbClr val="003956"/>
+                  <a:srgbClr val="B05C22"/>
                 </a:solidFill>
                 <a:latin typeface="프리젠테이션 5 Medium"/>
                 <a:ea typeface="프리젠테이션 5 Medium"/>
@@ -9163,7 +9163,7 @@
             <a:r>
               <a:rPr sz="1700" b="0">
                 <a:solidFill>
-                  <a:srgbClr val="003956"/>
+                  <a:srgbClr val="B05C22"/>
                 </a:solidFill>
                 <a:latin typeface="프리젠테이션 5 Medium"/>
                 <a:ea typeface="프리젠테이션 5 Medium"/>
@@ -9217,7 +9217,7 @@
             <a:r>
               <a:rPr sz="1700" b="0">
                 <a:solidFill>
-                  <a:srgbClr val="003956"/>
+                  <a:srgbClr val="B05C22"/>
                 </a:solidFill>
                 <a:latin typeface="프리젠테이션 5 Medium"/>
                 <a:ea typeface="프리젠테이션 5 Medium"/>
@@ -9408,7 +9408,7 @@
             <a:r>
               <a:rPr sz="1300" b="0">
                 <a:solidFill>
-                  <a:srgbClr val="003956"/>
+                  <a:srgbClr val="B05C22"/>
                 </a:solidFill>
                 <a:latin typeface="프리젠테이션 5 Medium"/>
                 <a:ea typeface="프리젠테이션 5 Medium"/>
@@ -10380,7 +10380,7 @@
             <a:r>
               <a:rPr sz="2000" b="0">
                 <a:solidFill>
-                  <a:srgbClr val="003956"/>
+                  <a:srgbClr val="B05C22"/>
                 </a:solidFill>
                 <a:latin typeface="프리젠테이션 5 Medium"/>
                 <a:ea typeface="프리젠테이션 5 Medium"/>
@@ -10537,7 +10537,7 @@
             <a:r>
               <a:rPr sz="1800" b="0">
                 <a:solidFill>
-                  <a:srgbClr val="003956"/>
+                  <a:srgbClr val="B05C22"/>
                 </a:solidFill>
                 <a:latin typeface="프리젠테이션 5 Medium"/>
                 <a:ea typeface="프리젠테이션 5 Medium"/>
@@ -10584,7 +10584,7 @@
             <a:r>
               <a:rPr sz="1800" b="0">
                 <a:solidFill>
-                  <a:srgbClr val="003956"/>
+                  <a:srgbClr val="B05C22"/>
                 </a:solidFill>
                 <a:latin typeface="프리젠테이션 5 Medium"/>
                 <a:ea typeface="프리젠테이션 5 Medium"/>
@@ -10613,7 +10613,7 @@
             <a:r>
               <a:rPr sz="1800" b="0">
                 <a:solidFill>
-                  <a:srgbClr val="003956"/>
+                  <a:srgbClr val="B05C22"/>
                 </a:solidFill>
                 <a:latin typeface="프리젠테이션 5 Medium"/>
                 <a:ea typeface="프리젠테이션 5 Medium"/>
@@ -11548,7 +11548,7 @@
             <a:r>
               <a:rPr sz="2700" b="0">
                 <a:solidFill>
-                  <a:srgbClr val="003956"/>
+                  <a:srgbClr val="B05C22"/>
                 </a:solidFill>
                 <a:latin typeface="프리젠테이션 5 Medium"/>
                 <a:ea typeface="프리젠테이션 5 Medium"/>
@@ -12317,7 +12317,7 @@
             <a:r>
               <a:rPr sz="4500" b="0">
                 <a:solidFill>
-                  <a:srgbClr val="003956"/>
+                  <a:srgbClr val="B05C22"/>
                 </a:solidFill>
                 <a:latin typeface="페이퍼로지 8 ExtraBold"/>
                 <a:ea typeface="페이퍼로지 8 ExtraBold"/>
@@ -12443,7 +12443,7 @@
             <a:r>
               <a:rPr sz="4500" b="0">
                 <a:solidFill>
-                  <a:srgbClr val="003956"/>
+                  <a:srgbClr val="B05C22"/>
                 </a:solidFill>
                 <a:latin typeface="페이퍼로지 8 ExtraBold"/>
                 <a:ea typeface="페이퍼로지 8 ExtraBold"/>
@@ -12569,7 +12569,7 @@
             <a:r>
               <a:rPr sz="4500" b="0">
                 <a:solidFill>
-                  <a:srgbClr val="003956"/>
+                  <a:srgbClr val="B05C22"/>
                 </a:solidFill>
                 <a:latin typeface="페이퍼로지 8 ExtraBold"/>
                 <a:ea typeface="페이퍼로지 8 ExtraBold"/>
@@ -12695,7 +12695,7 @@
             <a:r>
               <a:rPr sz="4500" b="0">
                 <a:solidFill>
-                  <a:srgbClr val="003956"/>
+                  <a:srgbClr val="B05C22"/>
                 </a:solidFill>
                 <a:latin typeface="페이퍼로지 8 ExtraBold"/>
                 <a:ea typeface="페이퍼로지 8 ExtraBold"/>
@@ -13126,7 +13126,7 @@
             </a:avLst>
           </a:prstGeom>
           <a:solidFill>
-            <a:srgbClr val="003956"/>
+            <a:srgbClr val="B05C22"/>
           </a:solidFill>
           <a:ln>
             <a:noFill/>
@@ -13235,7 +13235,7 @@
             <a:r>
               <a:rPr sz="2200" b="0">
                 <a:solidFill>
-                  <a:srgbClr val="003956"/>
+                  <a:srgbClr val="B05C22"/>
                 </a:solidFill>
                 <a:latin typeface="프리젠테이션 5 Medium"/>
                 <a:ea typeface="프리젠테이션 5 Medium"/>
@@ -13274,7 +13274,7 @@
             </a:avLst>
           </a:prstGeom>
           <a:solidFill>
-            <a:srgbClr val="003956"/>
+            <a:srgbClr val="B05C22"/>
           </a:solidFill>
           <a:ln>
             <a:noFill/>
@@ -13378,12 +13378,12 @@
                 <a:ea typeface="프리젠테이션 5 Medium"/>
                 <a:cs typeface="프리젠테이션 5 Medium"/>
               </a:rPr>
-              <a:t>교수님 강의 자료와 교재의 일부를 </a:t>
+              <a:t>교재의 그림·내용 일부를 </a:t>
             </a:r>
             <a:r>
               <a:rPr sz="2100" b="0">
                 <a:solidFill>
-                  <a:srgbClr val="003956"/>
+                  <a:srgbClr val="B05C22"/>
                 </a:solidFill>
                 <a:latin typeface="프리젠테이션 5 Medium"/>
                 <a:ea typeface="프리젠테이션 5 Medium"/>
@@ -13400,7 +13400,7 @@
                 <a:ea typeface="프리젠테이션 5 Medium"/>
                 <a:cs typeface="프리젠테이션 5 Medium"/>
               </a:rPr>
-              <a:t>에 따라 교육·연구 목적으로 발췌·인용하고, 각 슬라이드에 출처(교재 절·쪽)를 명시했다</a:t>
+              <a:t>에 따라 교육·연구 목적으로 발췌·인용하고, 각 슬라이드에 출처(교재 절·그림 번호)를 명시했다</a:t>
             </a:r>
           </a:p>
         </p:txBody>
@@ -13422,7 +13422,7 @@
             </a:avLst>
           </a:prstGeom>
           <a:solidFill>
-            <a:srgbClr val="003956"/>
+            <a:srgbClr val="B05C22"/>
           </a:solidFill>
           <a:ln>
             <a:noFill/>
@@ -13531,7 +13531,7 @@
             <a:r>
               <a:rPr sz="2900" b="0">
                 <a:solidFill>
-                  <a:srgbClr val="003956"/>
+                  <a:srgbClr val="B05C22"/>
                 </a:solidFill>
                 <a:latin typeface="프리젠테이션 5 Medium"/>
                 <a:ea typeface="프리젠테이션 5 Medium"/>
@@ -13681,7 +13681,7 @@
             <a:r>
               <a:rPr sz="1900" b="0">
                 <a:solidFill>
-                  <a:srgbClr val="003956"/>
+                  <a:srgbClr val="B05C22"/>
                 </a:solidFill>
                 <a:latin typeface="프리젠테이션 5 Medium"/>
                 <a:ea typeface="프리젠테이션 5 Medium"/>
@@ -13834,7 +13834,7 @@
               </a:lnSpc>
             </a:pPr>
             <a:r>
-              <a:rPr sz="2100" b="0">
+              <a:rPr sz="2300" b="0">
                 <a:solidFill>
                   <a:srgbClr val="1E2A30"/>
                 </a:solidFill>
@@ -13842,7 +13842,7 @@
                 <a:ea typeface="프리젠테이션 5 Medium"/>
                 <a:cs typeface="프리젠테이션 5 Medium"/>
               </a:rPr>
-              <a:t>정성환·배종욱, 『OpenCV-Python으로 배우는 영상 처리 및 응용』, 생능출판사  ·  담당 교수님 강의 자료(CH01~03)</a:t>
+              <a:t>정성환·배종욱, 『OpenCV-Python으로 배우는 영상 처리 및 응용』, 생능출판사  ·  수업 자료(CH01~03)</a:t>
             </a:r>
           </a:p>
         </p:txBody>
@@ -14581,7 +14581,7 @@
             </a:avLst>
           </a:prstGeom>
           <a:solidFill>
-            <a:srgbClr val="003956"/>
+            <a:srgbClr val="B05C22"/>
           </a:solidFill>
           <a:ln>
             <a:noFill/>
@@ -14690,7 +14690,7 @@
             <a:r>
               <a:rPr sz="2900" b="0">
                 <a:solidFill>
-                  <a:srgbClr val="003956"/>
+                  <a:srgbClr val="B05C22"/>
                 </a:solidFill>
                 <a:latin typeface="프리젠테이션 5 Medium"/>
                 <a:ea typeface="프리젠테이션 5 Medium"/>
@@ -14729,7 +14729,7 @@
             </a:avLst>
           </a:prstGeom>
           <a:solidFill>
-            <a:srgbClr val="003956"/>
+            <a:srgbClr val="B05C22"/>
           </a:solidFill>
           <a:ln>
             <a:noFill/>
@@ -14855,7 +14855,7 @@
             </a:avLst>
           </a:prstGeom>
           <a:solidFill>
-            <a:srgbClr val="003956"/>
+            <a:srgbClr val="B05C22"/>
           </a:solidFill>
           <a:ln>
             <a:noFill/>
@@ -14953,7 +14953,7 @@
             <a:r>
               <a:rPr sz="2900" b="0">
                 <a:solidFill>
-                  <a:srgbClr val="003956"/>
+                  <a:srgbClr val="B05C22"/>
                 </a:solidFill>
                 <a:latin typeface="프리젠테이션 5 Medium"/>
                 <a:ea typeface="프리젠테이션 5 Medium"/>
@@ -15101,7 +15101,7 @@
             <a:r>
               <a:rPr sz="2900" b="0">
                 <a:solidFill>
-                  <a:srgbClr val="003956"/>
+                  <a:srgbClr val="B05C22"/>
                 </a:solidFill>
                 <a:latin typeface="프리젠테이션 5 Medium"/>
                 <a:ea typeface="프리젠테이션 5 Medium"/>
@@ -15618,7 +15618,7 @@
             <a:r>
               <a:rPr sz="2500" b="0">
                 <a:solidFill>
-                  <a:srgbClr val="003956"/>
+                  <a:srgbClr val="B05C22"/>
                 </a:solidFill>
                 <a:latin typeface="페이퍼로지 8 ExtraBold"/>
                 <a:ea typeface="페이퍼로지 8 ExtraBold"/>
@@ -15659,7 +15659,7 @@
             <a:r>
               <a:rPr sz="2500" b="0">
                 <a:solidFill>
-                  <a:srgbClr val="003956"/>
+                  <a:srgbClr val="B05C22"/>
                 </a:solidFill>
                 <a:latin typeface="페이퍼로지 8 ExtraBold"/>
                 <a:ea typeface="페이퍼로지 8 ExtraBold"/>
@@ -15700,7 +15700,7 @@
             <a:r>
               <a:rPr sz="2500" b="0">
                 <a:solidFill>
-                  <a:srgbClr val="003956"/>
+                  <a:srgbClr val="B05C22"/>
                 </a:solidFill>
                 <a:latin typeface="페이퍼로지 8 ExtraBold"/>
                 <a:ea typeface="페이퍼로지 8 ExtraBold"/>
@@ -16513,7 +16513,7 @@
             <a:r>
               <a:rPr sz="1300" b="0">
                 <a:solidFill>
-                  <a:srgbClr val="003956"/>
+                  <a:srgbClr val="B05C22"/>
                 </a:solidFill>
                 <a:latin typeface="프리젠테이션 5 Medium"/>
                 <a:ea typeface="프리젠테이션 5 Medium"/>
@@ -16549,7 +16549,7 @@
             <a:r>
               <a:rPr sz="1300" b="0">
                 <a:solidFill>
-                  <a:srgbClr val="003956"/>
+                  <a:srgbClr val="B05C22"/>
                 </a:solidFill>
                 <a:latin typeface="프리젠테이션 5 Medium"/>
                 <a:ea typeface="프리젠테이션 5 Medium"/>
@@ -17149,7 +17149,7 @@
             <a:r>
               <a:rPr sz="2500" b="0">
                 <a:solidFill>
-                  <a:srgbClr val="003956"/>
+                  <a:srgbClr val="B05C22"/>
                 </a:solidFill>
                 <a:latin typeface="페이퍼로지 8 ExtraBold"/>
                 <a:ea typeface="페이퍼로지 8 ExtraBold"/>
@@ -17190,7 +17190,7 @@
             <a:r>
               <a:rPr sz="2500" b="0">
                 <a:solidFill>
-                  <a:srgbClr val="003956"/>
+                  <a:srgbClr val="B05C22"/>
                 </a:solidFill>
                 <a:latin typeface="페이퍼로지 8 ExtraBold"/>
                 <a:ea typeface="페이퍼로지 8 ExtraBold"/>
@@ -17231,7 +17231,7 @@
             <a:r>
               <a:rPr sz="2500" b="0">
                 <a:solidFill>
-                  <a:srgbClr val="003956"/>
+                  <a:srgbClr val="B05C22"/>
                 </a:solidFill>
                 <a:latin typeface="페이퍼로지 8 ExtraBold"/>
                 <a:ea typeface="페이퍼로지 8 ExtraBold"/>
@@ -18115,7 +18115,7 @@
             <a:r>
               <a:rPr sz="1900" b="0">
                 <a:solidFill>
-                  <a:srgbClr val="003956"/>
+                  <a:srgbClr val="B05C22"/>
                 </a:solidFill>
                 <a:latin typeface="프리젠테이션 5 Medium"/>
                 <a:ea typeface="프리젠테이션 5 Medium"/>
@@ -19671,7 +19671,7 @@
             <a:r>
               <a:rPr sz="1900" b="0">
                 <a:solidFill>
-                  <a:srgbClr val="003956"/>
+                  <a:srgbClr val="B05C22"/>
                 </a:solidFill>
                 <a:latin typeface="프리젠테이션 5 Medium"/>
                 <a:ea typeface="프리젠테이션 5 Medium"/>
@@ -20296,7 +20296,7 @@
             <a:r>
               <a:rPr sz="2500" b="0">
                 <a:solidFill>
-                  <a:srgbClr val="003956"/>
+                  <a:srgbClr val="B05C22"/>
                 </a:solidFill>
                 <a:latin typeface="페이퍼로지 8 ExtraBold"/>
                 <a:ea typeface="페이퍼로지 8 ExtraBold"/>
@@ -20337,7 +20337,7 @@
             <a:r>
               <a:rPr sz="2500" b="0">
                 <a:solidFill>
-                  <a:srgbClr val="003956"/>
+                  <a:srgbClr val="B05C22"/>
                 </a:solidFill>
                 <a:latin typeface="페이퍼로지 8 ExtraBold"/>
                 <a:ea typeface="페이퍼로지 8 ExtraBold"/>
@@ -20378,7 +20378,7 @@
             <a:r>
               <a:rPr sz="2500" b="0">
                 <a:solidFill>
-                  <a:srgbClr val="003956"/>
+                  <a:srgbClr val="B05C22"/>
                 </a:solidFill>
                 <a:latin typeface="페이퍼로지 8 ExtraBold"/>
                 <a:ea typeface="페이퍼로지 8 ExtraBold"/>
@@ -21084,7 +21084,7 @@
             <a:r>
               <a:rPr sz="2500" b="0">
                 <a:solidFill>
-                  <a:srgbClr val="003956"/>
+                  <a:srgbClr val="B05C22"/>
                 </a:solidFill>
                 <a:latin typeface="프리젠테이션 5 Medium"/>
                 <a:ea typeface="프리젠테이션 5 Medium"/>
@@ -21106,7 +21106,7 @@
             <a:r>
               <a:rPr sz="2500" b="0">
                 <a:solidFill>
-                  <a:srgbClr val="003956"/>
+                  <a:srgbClr val="B05C22"/>
                 </a:solidFill>
                 <a:latin typeface="프리젠테이션 5 Medium"/>
                 <a:ea typeface="프리젠테이션 5 Medium"/>
@@ -21706,7 +21706,7 @@
             <a:r>
               <a:rPr sz="2500" b="0">
                 <a:solidFill>
-                  <a:srgbClr val="003956"/>
+                  <a:srgbClr val="B05C22"/>
                 </a:solidFill>
                 <a:latin typeface="페이퍼로지 8 ExtraBold"/>
                 <a:ea typeface="페이퍼로지 8 ExtraBold"/>
@@ -21747,7 +21747,7 @@
             <a:r>
               <a:rPr sz="2500" b="0">
                 <a:solidFill>
-                  <a:srgbClr val="003956"/>
+                  <a:srgbClr val="B05C22"/>
                 </a:solidFill>
                 <a:latin typeface="페이퍼로지 8 ExtraBold"/>
                 <a:ea typeface="페이퍼로지 8 ExtraBold"/>
@@ -21788,7 +21788,7 @@
             <a:r>
               <a:rPr sz="2500" b="0">
                 <a:solidFill>
-                  <a:srgbClr val="003956"/>
+                  <a:srgbClr val="B05C22"/>
                 </a:solidFill>
                 <a:latin typeface="페이퍼로지 8 ExtraBold"/>
                 <a:ea typeface="페이퍼로지 8 ExtraBold"/>
@@ -22368,7 +22368,7 @@
             <a:r>
               <a:rPr sz="2500" b="0">
                 <a:solidFill>
-                  <a:srgbClr val="003956"/>
+                  <a:srgbClr val="B05C22"/>
                 </a:solidFill>
                 <a:latin typeface="프리젠테이션 5 Medium"/>
                 <a:ea typeface="프리젠테이션 5 Medium"/>
@@ -22672,7 +22672,7 @@
             <a:r>
               <a:rPr sz="1900" b="0">
                 <a:solidFill>
-                  <a:srgbClr val="003956"/>
+                  <a:srgbClr val="B05C22"/>
                 </a:solidFill>
                 <a:latin typeface="프리젠테이션 5 Medium"/>
                 <a:ea typeface="프리젠테이션 5 Medium"/>
@@ -22744,7 +22744,7 @@
             <a:r>
               <a:rPr sz="1900" b="0">
                 <a:solidFill>
-                  <a:srgbClr val="003956"/>
+                  <a:srgbClr val="B05C22"/>
                 </a:solidFill>
                 <a:latin typeface="프리젠테이션 5 Medium"/>
                 <a:ea typeface="프리젠테이션 5 Medium"/>
@@ -22912,7 +22912,7 @@
             <a:r>
               <a:rPr sz="2700" b="0">
                 <a:solidFill>
-                  <a:srgbClr val="003956"/>
+                  <a:srgbClr val="B05C22"/>
                 </a:solidFill>
                 <a:latin typeface="프리젠테이션 5 Medium"/>
                 <a:ea typeface="프리젠테이션 5 Medium"/>
@@ -22952,7 +22952,7 @@
             <a:r>
               <a:rPr sz="2700" b="0">
                 <a:solidFill>
-                  <a:srgbClr val="003956"/>
+                  <a:srgbClr val="B05C22"/>
                 </a:solidFill>
                 <a:latin typeface="프리젠테이션 5 Medium"/>
                 <a:ea typeface="프리젠테이션 5 Medium"/>

--- a/ips/영상처리시스템_CH03.pptx
+++ b/ips/영상처리시스템_CH03.pptx
@@ -4686,7 +4686,7 @@
                 <a:ea typeface="페이퍼로지 6 SemiBold"/>
                 <a:cs typeface="페이퍼로지 6 SemiBold"/>
               </a:rPr>
-              <a:t>CHAPTER 03  ·  파이썬 둘러보기</a:t>
+              <a:t>CHAPTER 03  ·  파이썬 최소 문법</a:t>
             </a:r>
           </a:p>
         </p:txBody>
@@ -5149,7 +5149,7 @@
                 <a:ea typeface="페이퍼로지 6 SemiBold"/>
                 <a:cs typeface="페이퍼로지 6 SemiBold"/>
               </a:rPr>
-              <a:t>CH 03 · 파이썬 둘러보기</a:t>
+              <a:t>CH 03 · 파이썬 최소 문법</a:t>
             </a:r>
           </a:p>
         </p:txBody>
@@ -6039,7 +6039,7 @@
                 <a:ea typeface="페이퍼로지 8 ExtraBold"/>
                 <a:cs typeface="페이퍼로지 8 ExtraBold"/>
               </a:rPr>
-              <a:t>3.4  조건과 반복 — 파이썬다운 세 가지</a:t>
+              <a:t>조건과 반복 — 파이썬다운 세 가지</a:t>
             </a:r>
           </a:p>
         </p:txBody>
@@ -6122,7 +6122,7 @@
                 <a:ea typeface="페이퍼로지 6 SemiBold"/>
                 <a:cs typeface="페이퍼로지 6 SemiBold"/>
               </a:rPr>
-              <a:t>CH 03 · 파이썬 둘러보기</a:t>
+              <a:t>CH 03 · 파이썬 최소 문법</a:t>
             </a:r>
           </a:p>
         </p:txBody>
@@ -7307,7 +7307,7 @@
                 <a:ea typeface="페이퍼로지 8 ExtraBold"/>
                 <a:cs typeface="페이퍼로지 8 ExtraBold"/>
               </a:rPr>
-              <a:t>3.5  함수 — 반환도 여럿, 인수도 기본값</a:t>
+              <a:t>함수 — 반환도 여럿, 인수도 기본값</a:t>
             </a:r>
           </a:p>
         </p:txBody>
@@ -7390,7 +7390,7 @@
                 <a:ea typeface="페이퍼로지 6 SemiBold"/>
                 <a:cs typeface="페이퍼로지 6 SemiBold"/>
               </a:rPr>
-              <a:t>CH 03 · 파이썬 둘러보기</a:t>
+              <a:t>CH 03 · 파이썬 최소 문법</a:t>
             </a:r>
           </a:p>
         </p:txBody>
@@ -8564,7 +8564,7 @@
                 <a:ea typeface="페이퍼로지 8 ExtraBold"/>
                 <a:cs typeface="페이퍼로지 8 ExtraBold"/>
               </a:rPr>
-              <a:t>3.6  넘파이 — 드디어 영상의 그릇</a:t>
+              <a:t>넘파이 — 드디어 영상의 그릇</a:t>
             </a:r>
           </a:p>
         </p:txBody>
@@ -8647,7 +8647,7 @@
                 <a:ea typeface="페이퍼로지 6 SemiBold"/>
                 <a:cs typeface="페이퍼로지 6 SemiBold"/>
               </a:rPr>
-              <a:t>CH 03 · 파이썬 둘러보기</a:t>
+              <a:t>CH 03 · 파이썬 최소 문법</a:t>
             </a:r>
           </a:p>
         </p:txBody>
@@ -9870,7 +9870,7 @@
                 <a:ea typeface="페이퍼로지 6 SemiBold"/>
                 <a:cs typeface="페이퍼로지 6 SemiBold"/>
               </a:rPr>
-              <a:t>CH 03 · 파이썬 둘러보기</a:t>
+              <a:t>CH 03 · 파이썬 최소 문법</a:t>
             </a:r>
           </a:p>
         </p:txBody>
@@ -11100,7 +11100,7 @@
                 <a:ea typeface="페이퍼로지 6 SemiBold"/>
                 <a:cs typeface="페이퍼로지 6 SemiBold"/>
               </a:rPr>
-              <a:t>CH 03 · 파이썬 둘러보기</a:t>
+              <a:t>CH 03 · 파이썬 최소 문법</a:t>
             </a:r>
           </a:p>
         </p:txBody>
@@ -12197,7 +12197,7 @@
                 <a:ea typeface="페이퍼로지 6 SemiBold"/>
                 <a:cs typeface="페이퍼로지 6 SemiBold"/>
               </a:rPr>
-              <a:t>CH 03 · 파이썬 둘러보기</a:t>
+              <a:t>CH 03 · 파이썬 최소 문법</a:t>
             </a:r>
           </a:p>
         </p:txBody>
@@ -13992,7 +13992,7 @@
                 <a:ea typeface="페이퍼로지 8 ExtraBold"/>
                 <a:cs typeface="페이퍼로지 8 ExtraBold"/>
               </a:rPr>
-              <a:t>파이썬 둘러보기</a:t>
+              <a:t>파이썬 최소 문법</a:t>
             </a:r>
           </a:p>
         </p:txBody>
@@ -14033,7 +14033,7 @@
                 <a:ea typeface="페이퍼로지 6 SemiBold"/>
                 <a:cs typeface="페이퍼로지 6 SemiBold"/>
               </a:rPr>
-              <a:t>A Tour of Python for Image Processing</a:t>
+              <a:t>Just Enough Python for Images</a:t>
             </a:r>
           </a:p>
         </p:txBody>
@@ -14074,7 +14074,7 @@
                 <a:ea typeface="프리젠테이션 5 Medium"/>
                 <a:cs typeface="프리젠테이션 5 Medium"/>
               </a:rPr>
-              <a:t>·  3.1 자료 구조   ·   3.2 명령행   ·   3.3 연산자</a:t>
+              <a:t>·  리터럴·변수·동적 타입   ·   값을 담는 네 가지 그릇</a:t>
             </a:r>
           </a:p>
         </p:txBody>
@@ -14115,7 +14115,7 @@
                 <a:ea typeface="프리젠테이션 5 Medium"/>
                 <a:cs typeface="프리젠테이션 5 Medium"/>
               </a:rPr>
-              <a:t>·  3.4 기본 명령문   ·   3.5 함수와 라이브러리</a:t>
+              <a:t>·  명령행 문법   ·   연산자와 슬라이스   ·   조건과 반복</a:t>
             </a:r>
           </a:p>
         </p:txBody>
@@ -14156,7 +14156,7 @@
                 <a:ea typeface="프리젠테이션 5 Medium"/>
                 <a:cs typeface="프리젠테이션 5 Medium"/>
               </a:rPr>
-              <a:t>·  3.6 넘파이(NumPy) 패키지</a:t>
+              <a:t>·  함수와 모듈   ·   넘파이, 영상의 그릇</a:t>
             </a:r>
           </a:p>
         </p:txBody>
@@ -14518,7 +14518,7 @@
                 <a:ea typeface="페이퍼로지 6 SemiBold"/>
                 <a:cs typeface="페이퍼로지 6 SemiBold"/>
               </a:rPr>
-              <a:t>CH 03 · 파이썬 둘러보기</a:t>
+              <a:t>CH 03 · 파이썬 최소 문법</a:t>
             </a:r>
           </a:p>
         </p:txBody>
@@ -15415,7 +15415,7 @@
                 <a:ea typeface="페이퍼로지 8 ExtraBold"/>
                 <a:cs typeface="페이퍼로지 8 ExtraBold"/>
               </a:rPr>
-              <a:t>3.1  리터럴 · 상수 · 변수</a:t>
+              <a:t>리터럴 · 상수 · 변수</a:t>
             </a:r>
           </a:p>
         </p:txBody>
@@ -15498,7 +15498,7 @@
                 <a:ea typeface="페이퍼로지 6 SemiBold"/>
                 <a:cs typeface="페이퍼로지 6 SemiBold"/>
               </a:rPr>
-              <a:t>CH 03 · 파이썬 둘러보기</a:t>
+              <a:t>CH 03 · 파이썬 최소 문법</a:t>
             </a:r>
           </a:p>
         </p:txBody>
@@ -16946,7 +16946,7 @@
                 <a:ea typeface="페이퍼로지 8 ExtraBold"/>
                 <a:cs typeface="페이퍼로지 8 ExtraBold"/>
               </a:rPr>
-              <a:t>표 3.1  리터럴의 다섯 종류</a:t>
+              <a:t>리터럴의 다섯 종류</a:t>
             </a:r>
           </a:p>
         </p:txBody>
@@ -17029,7 +17029,7 @@
                 <a:ea typeface="페이퍼로지 6 SemiBold"/>
                 <a:cs typeface="페이퍼로지 6 SemiBold"/>
               </a:rPr>
-              <a:t>CH 03 · 파이썬 둘러보기</a:t>
+              <a:t>CH 03 · 파이썬 최소 문법</a:t>
             </a:r>
           </a:p>
         </p:txBody>
@@ -18512,7 +18512,7 @@
                 <a:ea typeface="페이퍼로지 8 ExtraBold"/>
                 <a:cs typeface="페이퍼로지 8 ExtraBold"/>
               </a:rPr>
-              <a:t>자료 구조 4종 — 그릇의 성격이 다르다</a:t>
+              <a:t>값을 담는 네 가지 그릇</a:t>
             </a:r>
           </a:p>
         </p:txBody>
@@ -18595,7 +18595,7 @@
                 <a:ea typeface="페이퍼로지 6 SemiBold"/>
                 <a:cs typeface="페이퍼로지 6 SemiBold"/>
               </a:rPr>
-              <a:t>CH 03 · 파이썬 둘러보기</a:t>
+              <a:t>CH 03 · 파이썬 최소 문법</a:t>
             </a:r>
           </a:p>
         </p:txBody>
@@ -20093,7 +20093,7 @@
                 <a:ea typeface="페이퍼로지 8 ExtraBold"/>
                 <a:cs typeface="페이퍼로지 8 ExtraBold"/>
               </a:rPr>
-              <a:t>3.2  한 줄처럼 보이는 여러 줄, 여러 줄 같은 한 줄</a:t>
+              <a:t>명령행 문법 — 줄을 잇고 나누는 법</a:t>
             </a:r>
           </a:p>
         </p:txBody>
@@ -20176,7 +20176,7 @@
                 <a:ea typeface="페이퍼로지 6 SemiBold"/>
                 <a:cs typeface="페이퍼로지 6 SemiBold"/>
               </a:rPr>
-              <a:t>CH 03 · 파이썬 둘러보기</a:t>
+              <a:t>CH 03 · 파이썬 최소 문법</a:t>
             </a:r>
           </a:p>
         </p:txBody>
@@ -21503,7 +21503,7 @@
                 <a:ea typeface="페이퍼로지 8 ExtraBold"/>
                 <a:cs typeface="페이퍼로지 8 ExtraBold"/>
               </a:rPr>
-              <a:t>3.3  연산자 — 헷갈리는 것만 정확히</a:t>
+              <a:t>연산자 — 헷갈리는 것만 정확히</a:t>
             </a:r>
           </a:p>
         </p:txBody>
@@ -21586,7 +21586,7 @@
                 <a:ea typeface="페이퍼로지 6 SemiBold"/>
                 <a:cs typeface="페이퍼로지 6 SemiBold"/>
               </a:rPr>
-              <a:t>CH 03 · 파이썬 둘러보기</a:t>
+              <a:t>CH 03 · 파이썬 최소 문법</a:t>
             </a:r>
           </a:p>
         </p:txBody>

--- a/ips/영상처리시스템_CH03.pptx
+++ b/ips/영상처리시스템_CH03.pptx
@@ -4686,7 +4686,7 @@
                 <a:ea typeface="페이퍼로지 6 SemiBold"/>
                 <a:cs typeface="페이퍼로지 6 SemiBold"/>
               </a:rPr>
-              <a:t>CHAPTER 03  ·  파이썬 최소 문법</a:t>
+              <a:t>CHAPTER 03  ·  파이썬 핵심 문법</a:t>
             </a:r>
           </a:p>
         </p:txBody>
@@ -5149,7 +5149,7 @@
                 <a:ea typeface="페이퍼로지 6 SemiBold"/>
                 <a:cs typeface="페이퍼로지 6 SemiBold"/>
               </a:rPr>
-              <a:t>CH 03 · 파이썬 최소 문법</a:t>
+              <a:t>CH 03 · 파이썬 핵심 문법</a:t>
             </a:r>
           </a:p>
         </p:txBody>
@@ -6122,7 +6122,7 @@
                 <a:ea typeface="페이퍼로지 6 SemiBold"/>
                 <a:cs typeface="페이퍼로지 6 SemiBold"/>
               </a:rPr>
-              <a:t>CH 03 · 파이썬 최소 문법</a:t>
+              <a:t>CH 03 · 파이썬 핵심 문법</a:t>
             </a:r>
           </a:p>
         </p:txBody>
@@ -7390,7 +7390,7 @@
                 <a:ea typeface="페이퍼로지 6 SemiBold"/>
                 <a:cs typeface="페이퍼로지 6 SemiBold"/>
               </a:rPr>
-              <a:t>CH 03 · 파이썬 최소 문법</a:t>
+              <a:t>CH 03 · 파이썬 핵심 문법</a:t>
             </a:r>
           </a:p>
         </p:txBody>
@@ -8647,7 +8647,7 @@
                 <a:ea typeface="페이퍼로지 6 SemiBold"/>
                 <a:cs typeface="페이퍼로지 6 SemiBold"/>
               </a:rPr>
-              <a:t>CH 03 · 파이썬 최소 문법</a:t>
+              <a:t>CH 03 · 파이썬 핵심 문법</a:t>
             </a:r>
           </a:p>
         </p:txBody>
@@ -9870,7 +9870,7 @@
                 <a:ea typeface="페이퍼로지 6 SemiBold"/>
                 <a:cs typeface="페이퍼로지 6 SemiBold"/>
               </a:rPr>
-              <a:t>CH 03 · 파이썬 최소 문법</a:t>
+              <a:t>CH 03 · 파이썬 핵심 문법</a:t>
             </a:r>
           </a:p>
         </p:txBody>
@@ -11100,7 +11100,7 @@
                 <a:ea typeface="페이퍼로지 6 SemiBold"/>
                 <a:cs typeface="페이퍼로지 6 SemiBold"/>
               </a:rPr>
-              <a:t>CH 03 · 파이썬 최소 문법</a:t>
+              <a:t>CH 03 · 파이썬 핵심 문법</a:t>
             </a:r>
           </a:p>
         </p:txBody>
@@ -12197,7 +12197,7 @@
                 <a:ea typeface="페이퍼로지 6 SemiBold"/>
                 <a:cs typeface="페이퍼로지 6 SemiBold"/>
               </a:rPr>
-              <a:t>CH 03 · 파이썬 최소 문법</a:t>
+              <a:t>CH 03 · 파이썬 핵심 문법</a:t>
             </a:r>
           </a:p>
         </p:txBody>
@@ -13992,7 +13992,7 @@
                 <a:ea typeface="페이퍼로지 8 ExtraBold"/>
                 <a:cs typeface="페이퍼로지 8 ExtraBold"/>
               </a:rPr>
-              <a:t>파이썬 최소 문법</a:t>
+              <a:t>파이썬 핵심 문법</a:t>
             </a:r>
           </a:p>
         </p:txBody>
@@ -14033,7 +14033,7 @@
                 <a:ea typeface="페이퍼로지 6 SemiBold"/>
                 <a:cs typeface="페이퍼로지 6 SemiBold"/>
               </a:rPr>
-              <a:t>Just Enough Python for Images</a:t>
+              <a:t>Data Structures, Slicing and NumPy</a:t>
             </a:r>
           </a:p>
         </p:txBody>
@@ -14518,7 +14518,7 @@
                 <a:ea typeface="페이퍼로지 6 SemiBold"/>
                 <a:cs typeface="페이퍼로지 6 SemiBold"/>
               </a:rPr>
-              <a:t>CH 03 · 파이썬 최소 문법</a:t>
+              <a:t>CH 03 · 파이썬 핵심 문법</a:t>
             </a:r>
           </a:p>
         </p:txBody>
@@ -15498,7 +15498,7 @@
                 <a:ea typeface="페이퍼로지 6 SemiBold"/>
                 <a:cs typeface="페이퍼로지 6 SemiBold"/>
               </a:rPr>
-              <a:t>CH 03 · 파이썬 최소 문법</a:t>
+              <a:t>CH 03 · 파이썬 핵심 문법</a:t>
             </a:r>
           </a:p>
         </p:txBody>
@@ -17029,7 +17029,7 @@
                 <a:ea typeface="페이퍼로지 6 SemiBold"/>
                 <a:cs typeface="페이퍼로지 6 SemiBold"/>
               </a:rPr>
-              <a:t>CH 03 · 파이썬 최소 문법</a:t>
+              <a:t>CH 03 · 파이썬 핵심 문법</a:t>
             </a:r>
           </a:p>
         </p:txBody>
@@ -18595,7 +18595,7 @@
                 <a:ea typeface="페이퍼로지 6 SemiBold"/>
                 <a:cs typeface="페이퍼로지 6 SemiBold"/>
               </a:rPr>
-              <a:t>CH 03 · 파이썬 최소 문법</a:t>
+              <a:t>CH 03 · 파이썬 핵심 문법</a:t>
             </a:r>
           </a:p>
         </p:txBody>
@@ -20176,7 +20176,7 @@
                 <a:ea typeface="페이퍼로지 6 SemiBold"/>
                 <a:cs typeface="페이퍼로지 6 SemiBold"/>
               </a:rPr>
-              <a:t>CH 03 · 파이썬 최소 문법</a:t>
+              <a:t>CH 03 · 파이썬 핵심 문법</a:t>
             </a:r>
           </a:p>
         </p:txBody>
@@ -21586,7 +21586,7 @@
                 <a:ea typeface="페이퍼로지 6 SemiBold"/>
                 <a:cs typeface="페이퍼로지 6 SemiBold"/>
               </a:rPr>
-              <a:t>CH 03 · 파이썬 최소 문법</a:t>
+              <a:t>CH 03 · 파이썬 핵심 문법</a:t>
             </a:r>
           </a:p>
         </p:txBody>

--- a/ips/영상처리시스템_CH03.pptx
+++ b/ips/영상처리시스템_CH03.pptx
@@ -4511,7 +4511,7 @@
               </a:lnSpc>
             </a:pPr>
             <a:r>
-              <a:rPr sz="2400" b="0">
+              <a:rPr sz="2400" b="0" lang="ko-KR" altLang="en-US">
                 <a:solidFill>
                   <a:srgbClr val="96A8A7"/>
                 </a:solidFill>
@@ -4552,7 +4552,7 @@
               </a:lnSpc>
             </a:pPr>
             <a:r>
-              <a:rPr sz="8500" b="0">
+              <a:rPr sz="8500" b="0" lang="ko-KR" altLang="en-US">
                 <a:solidFill>
                   <a:srgbClr val="FFFFFF"/>
                 </a:solidFill>
@@ -4637,7 +4637,7 @@
               </a:lnSpc>
             </a:pPr>
             <a:r>
-              <a:rPr sz="2600" b="0">
+              <a:rPr sz="2600" b="0" lang="ko-KR" altLang="en-US">
                 <a:solidFill>
                   <a:srgbClr val="FFFFFF"/>
                 </a:solidFill>
@@ -4678,7 +4678,7 @@
               </a:lnSpc>
             </a:pPr>
             <a:r>
-              <a:rPr sz="2900" b="0">
+              <a:rPr sz="2900" b="0" lang="ko-KR" altLang="en-US">
                 <a:solidFill>
                   <a:srgbClr val="C9D4E2"/>
                 </a:solidFill>
@@ -4761,7 +4761,7 @@
               </a:lnSpc>
             </a:pPr>
             <a:r>
-              <a:rPr sz="2500" b="0">
+              <a:rPr sz="2500" b="0" lang="ko-KR" altLang="en-US">
                 <a:solidFill>
                   <a:srgbClr val="96A8A7"/>
                 </a:solidFill>
@@ -4779,7 +4779,7 @@
               </a:lnSpc>
             </a:pPr>
             <a:r>
-              <a:rPr sz="2500" b="0">
+              <a:rPr sz="2500" b="0" lang="ko-KR" altLang="en-US">
                 <a:solidFill>
                   <a:srgbClr val="96A8A7"/>
                 </a:solidFill>
@@ -4914,7 +4914,7 @@
               </a:lnSpc>
             </a:pPr>
             <a:r>
-              <a:rPr sz="1250" b="0">
+              <a:rPr sz="1250" b="0" lang="ko-KR" altLang="en-US">
                 <a:solidFill>
                   <a:srgbClr val="003956"/>
                 </a:solidFill>
@@ -4932,7 +4932,7 @@
               </a:lnSpc>
             </a:pPr>
             <a:r>
-              <a:rPr sz="1250" b="0">
+              <a:rPr sz="1250" b="0" lang="ko-KR" altLang="en-US">
                 <a:solidFill>
                   <a:srgbClr val="003956"/>
                 </a:solidFill>
@@ -4973,7 +4973,7 @@
               </a:lnSpc>
             </a:pPr>
             <a:r>
-              <a:rPr sz="1600" b="0">
+              <a:rPr sz="1600" b="0" lang="ko-KR" altLang="en-US">
                 <a:solidFill>
                   <a:srgbClr val="96A8A7"/>
                 </a:solidFill>
@@ -5058,7 +5058,7 @@
               </a:lnSpc>
             </a:pPr>
             <a:r>
-              <a:rPr sz="3500" b="0">
+              <a:rPr sz="3500" b="0" lang="ko-KR" altLang="en-US">
                 <a:solidFill>
                   <a:srgbClr val="1E2A30"/>
                 </a:solidFill>
@@ -5141,7 +5141,7 @@
               </a:lnSpc>
             </a:pPr>
             <a:r>
-              <a:rPr sz="2200" b="0">
+              <a:rPr sz="2200" b="0" lang="ko-KR" altLang="en-US">
                 <a:solidFill>
                   <a:srgbClr val="6B7A80"/>
                 </a:solidFill>
@@ -5182,7 +5182,7 @@
               </a:lnSpc>
             </a:pPr>
             <a:r>
-              <a:rPr sz="2100" b="0">
+              <a:rPr sz="2100" b="0" lang="ko-KR" altLang="en-US">
                 <a:solidFill>
                   <a:srgbClr val="6B7A80"/>
                 </a:solidFill>
@@ -5337,7 +5337,7 @@
               </a:lnSpc>
             </a:pPr>
             <a:r>
-              <a:rPr sz="2300" b="0">
+              <a:rPr sz="2300" b="0" lang="ko-KR" altLang="en-US">
                 <a:solidFill>
                   <a:srgbClr val="6B7A80"/>
                 </a:solidFill>
@@ -5422,7 +5422,7 @@
               </a:lnSpc>
             </a:pPr>
             <a:r>
-              <a:rPr sz="1300" b="0">
+              <a:rPr sz="1300" b="0" lang="ko-KR" altLang="en-US">
                 <a:solidFill>
                   <a:srgbClr val="96A8A7"/>
                 </a:solidFill>
@@ -5566,7 +5566,7 @@
               </a:lnSpc>
             </a:pPr>
             <a:r>
-              <a:rPr sz="2700" b="0">
+              <a:rPr sz="2700" b="0" lang="ko-KR" altLang="en-US">
                 <a:solidFill>
                   <a:srgbClr val="003956"/>
                 </a:solidFill>
@@ -5607,7 +5607,7 @@
               </a:lnSpc>
             </a:pPr>
             <a:r>
-              <a:rPr sz="2900" b="0">
+              <a:rPr sz="2900" b="0" lang="ko-KR" altLang="en-US">
                 <a:solidFill>
                   <a:srgbClr val="1E2A30"/>
                 </a:solidFill>
@@ -5618,7 +5618,7 @@
               <a:t>끝은 </a:t>
             </a:r>
             <a:r>
-              <a:rPr sz="2900" b="0">
+              <a:rPr sz="2900" b="0" lang="ko-KR" altLang="en-US">
                 <a:solidFill>
                   <a:srgbClr val="B05C22"/>
                 </a:solidFill>
@@ -5629,7 +5629,7 @@
               <a:t>미포함</a:t>
             </a:r>
             <a:r>
-              <a:rPr sz="2900" b="0">
+              <a:rPr sz="2900" b="0" lang="ko-KR" altLang="en-US">
                 <a:solidFill>
                   <a:srgbClr val="1E2A30"/>
                 </a:solidFill>
@@ -5647,7 +5647,7 @@
               </a:lnSpc>
             </a:pPr>
             <a:r>
-              <a:rPr sz="2900" b="0">
+              <a:rPr sz="2900" b="0" lang="ko-KR" altLang="en-US">
                 <a:solidFill>
                   <a:srgbClr val="1E2A30"/>
                 </a:solidFill>
@@ -5658,7 +5658,7 @@
               <a:t>[::-1]은 </a:t>
             </a:r>
             <a:r>
-              <a:rPr sz="2900" b="0">
+              <a:rPr sz="2900" b="0" lang="ko-KR" altLang="en-US">
                 <a:solidFill>
                   <a:srgbClr val="B05C22"/>
                 </a:solidFill>
@@ -5669,7 +5669,7 @@
               <a:t>통째로 역순</a:t>
             </a:r>
             <a:r>
-              <a:rPr sz="2900" b="0">
+              <a:rPr sz="2900" b="0" lang="ko-KR" altLang="en-US">
                 <a:solidFill>
                   <a:srgbClr val="1E2A30"/>
                 </a:solidFill>
@@ -5752,7 +5752,7 @@
               </a:lnSpc>
             </a:pPr>
             <a:r>
-              <a:rPr sz="2200" b="0">
+              <a:rPr sz="2200" b="0" lang="ko-KR" altLang="en-US">
                 <a:solidFill>
                   <a:srgbClr val="6B7A80"/>
                 </a:solidFill>
@@ -5887,7 +5887,7 @@
               </a:lnSpc>
             </a:pPr>
             <a:r>
-              <a:rPr sz="1250" b="0">
+              <a:rPr sz="1250" b="0" lang="ko-KR" altLang="en-US">
                 <a:solidFill>
                   <a:srgbClr val="003956"/>
                 </a:solidFill>
@@ -5905,7 +5905,7 @@
               </a:lnSpc>
             </a:pPr>
             <a:r>
-              <a:rPr sz="1250" b="0">
+              <a:rPr sz="1250" b="0" lang="ko-KR" altLang="en-US">
                 <a:solidFill>
                   <a:srgbClr val="003956"/>
                 </a:solidFill>
@@ -5946,7 +5946,7 @@
               </a:lnSpc>
             </a:pPr>
             <a:r>
-              <a:rPr sz="1600" b="0">
+              <a:rPr sz="1600" b="0" lang="ko-KR" altLang="en-US">
                 <a:solidFill>
                   <a:srgbClr val="96A8A7"/>
                 </a:solidFill>
@@ -6031,7 +6031,7 @@
               </a:lnSpc>
             </a:pPr>
             <a:r>
-              <a:rPr sz="3500" b="0">
+              <a:rPr sz="3500" b="0" lang="ko-KR" altLang="en-US">
                 <a:solidFill>
                   <a:srgbClr val="1E2A30"/>
                 </a:solidFill>
@@ -6114,7 +6114,7 @@
               </a:lnSpc>
             </a:pPr>
             <a:r>
-              <a:rPr sz="2200" b="0">
+              <a:rPr sz="2200" b="0" lang="ko-KR" altLang="en-US">
                 <a:solidFill>
                   <a:srgbClr val="6B7A80"/>
                 </a:solidFill>
@@ -6155,7 +6155,7 @@
               </a:lnSpc>
             </a:pPr>
             <a:r>
-              <a:rPr sz="2100" b="0">
+              <a:rPr sz="2100" b="0" lang="ko-KR" altLang="en-US">
                 <a:solidFill>
                   <a:srgbClr val="6B7A80"/>
                 </a:solidFill>
@@ -6240,7 +6240,7 @@
               </a:lnSpc>
             </a:pPr>
             <a:r>
-              <a:rPr sz="1300" b="0">
+              <a:rPr sz="1300" b="0" lang="ko-KR" altLang="en-US">
                 <a:solidFill>
                   <a:srgbClr val="96A8A7"/>
                 </a:solidFill>
@@ -6618,7 +6618,7 @@
               </a:lnSpc>
             </a:pPr>
             <a:r>
-              <a:rPr sz="1300" b="0">
+              <a:rPr sz="1300" b="0" lang="ko-KR" altLang="en-US">
                 <a:solidFill>
                   <a:srgbClr val="96A8A7"/>
                 </a:solidFill>
@@ -6816,7 +6816,7 @@
               </a:lnSpc>
             </a:pPr>
             <a:r>
-              <a:rPr sz="2700" b="0">
+              <a:rPr sz="2700" b="0" lang="ko-KR" altLang="en-US">
                 <a:solidFill>
                   <a:srgbClr val="003956"/>
                 </a:solidFill>
@@ -6857,7 +6857,7 @@
               </a:lnSpc>
             </a:pPr>
             <a:r>
-              <a:rPr sz="2200" b="0">
+              <a:rPr sz="2200" b="0" lang="ko-KR" altLang="en-US">
                 <a:solidFill>
                   <a:srgbClr val="1E2A30"/>
                 </a:solidFill>
@@ -6868,7 +6868,7 @@
               <a:t>블록은 </a:t>
             </a:r>
             <a:r>
-              <a:rPr sz="2200" b="0">
+              <a:rPr sz="2200" b="0" lang="ko-KR" altLang="en-US">
                 <a:solidFill>
                   <a:srgbClr val="B05C22"/>
                 </a:solidFill>
@@ -6879,7 +6879,7 @@
               <a:t>들여쓰기</a:t>
             </a:r>
             <a:r>
-              <a:rPr sz="2200" b="0">
+              <a:rPr sz="2200" b="0" lang="ko-KR" altLang="en-US">
                 <a:solidFill>
                   <a:srgbClr val="1E2A30"/>
                 </a:solidFill>
@@ -6890,7 +6890,7 @@
               <a:t>, 헤더 끝은 </a:t>
             </a:r>
             <a:r>
-              <a:rPr sz="2200" b="0">
+              <a:rPr sz="2200" b="0" lang="ko-KR" altLang="en-US">
                 <a:solidFill>
                   <a:srgbClr val="B05C22"/>
                 </a:solidFill>
@@ -6908,7 +6908,7 @@
               </a:lnSpc>
             </a:pPr>
             <a:r>
-              <a:rPr sz="2200" b="0">
+              <a:rPr sz="2200" b="0" lang="ko-KR" altLang="en-US">
                 <a:solidFill>
                   <a:srgbClr val="B05C22"/>
                 </a:solidFill>
@@ -6919,7 +6919,7 @@
               <a:t>while-else</a:t>
             </a:r>
             <a:r>
-              <a:rPr sz="2200" b="0">
+              <a:rPr sz="2200" b="0" lang="ko-KR" altLang="en-US">
                 <a:solidFill>
                   <a:srgbClr val="1E2A30"/>
                 </a:solidFill>
@@ -6937,7 +6937,7 @@
               </a:lnSpc>
             </a:pPr>
             <a:r>
-              <a:rPr sz="2200" b="0">
+              <a:rPr sz="2200" b="0" lang="ko-KR" altLang="en-US">
                 <a:solidFill>
                   <a:srgbClr val="1E2A30"/>
                 </a:solidFill>
@@ -7020,7 +7020,7 @@
               </a:lnSpc>
             </a:pPr>
             <a:r>
-              <a:rPr sz="2200" b="0">
+              <a:rPr sz="2200" b="0" lang="ko-KR" altLang="en-US">
                 <a:solidFill>
                   <a:srgbClr val="6B7A80"/>
                 </a:solidFill>
@@ -7155,7 +7155,7 @@
               </a:lnSpc>
             </a:pPr>
             <a:r>
-              <a:rPr sz="1250" b="0">
+              <a:rPr sz="1250" b="0" lang="ko-KR" altLang="en-US">
                 <a:solidFill>
                   <a:srgbClr val="003956"/>
                 </a:solidFill>
@@ -7173,7 +7173,7 @@
               </a:lnSpc>
             </a:pPr>
             <a:r>
-              <a:rPr sz="1250" b="0">
+              <a:rPr sz="1250" b="0" lang="ko-KR" altLang="en-US">
                 <a:solidFill>
                   <a:srgbClr val="003956"/>
                 </a:solidFill>
@@ -7214,7 +7214,7 @@
               </a:lnSpc>
             </a:pPr>
             <a:r>
-              <a:rPr sz="1600" b="0">
+              <a:rPr sz="1600" b="0" lang="ko-KR" altLang="en-US">
                 <a:solidFill>
                   <a:srgbClr val="96A8A7"/>
                 </a:solidFill>
@@ -7299,7 +7299,7 @@
               </a:lnSpc>
             </a:pPr>
             <a:r>
-              <a:rPr sz="3500" b="0">
+              <a:rPr sz="3500" b="0" lang="ko-KR" altLang="en-US">
                 <a:solidFill>
                   <a:srgbClr val="1E2A30"/>
                 </a:solidFill>
@@ -7382,7 +7382,7 @@
               </a:lnSpc>
             </a:pPr>
             <a:r>
-              <a:rPr sz="2200" b="0">
+              <a:rPr sz="2200" b="0" lang="ko-KR" altLang="en-US">
                 <a:solidFill>
                   <a:srgbClr val="6B7A80"/>
                 </a:solidFill>
@@ -7423,7 +7423,7 @@
               </a:lnSpc>
             </a:pPr>
             <a:r>
-              <a:rPr sz="2100" b="0">
+              <a:rPr sz="2100" b="0" lang="ko-KR" altLang="en-US">
                 <a:solidFill>
                   <a:srgbClr val="6B7A80"/>
                 </a:solidFill>
@@ -7508,7 +7508,7 @@
               </a:lnSpc>
             </a:pPr>
             <a:r>
-              <a:rPr sz="1300" b="0">
+              <a:rPr sz="1300" b="0" lang="ko-KR" altLang="en-US">
                 <a:solidFill>
                   <a:srgbClr val="96A8A7"/>
                 </a:solidFill>
@@ -7886,7 +7886,7 @@
               </a:lnSpc>
             </a:pPr>
             <a:r>
-              <a:rPr sz="2700" b="0">
+              <a:rPr sz="2700" b="0" lang="ko-KR" altLang="en-US">
                 <a:solidFill>
                   <a:srgbClr val="003956"/>
                 </a:solidFill>
@@ -7927,7 +7927,7 @@
               </a:lnSpc>
             </a:pPr>
             <a:r>
-              <a:rPr sz="2900" b="0">
+              <a:rPr sz="2900" b="0" lang="ko-KR" altLang="en-US">
                 <a:solidFill>
                   <a:srgbClr val="1E2A30"/>
                 </a:solidFill>
@@ -7938,7 +7938,7 @@
               <a:t>① 여러 값 반환 = </a:t>
             </a:r>
             <a:r>
-              <a:rPr sz="2900" b="0">
+              <a:rPr sz="2900" b="0" lang="ko-KR" altLang="en-US">
                 <a:solidFill>
                   <a:srgbClr val="B05C22"/>
                 </a:solidFill>
@@ -7956,7 +7956,7 @@
               </a:lnSpc>
             </a:pPr>
             <a:r>
-              <a:rPr sz="2900" b="0">
+              <a:rPr sz="2900" b="0" lang="ko-KR" altLang="en-US">
                 <a:solidFill>
                   <a:srgbClr val="1E2A30"/>
                 </a:solidFill>
@@ -7974,7 +7974,7 @@
               </a:lnSpc>
             </a:pPr>
             <a:r>
-              <a:rPr sz="2900" b="0">
+              <a:rPr sz="2900" b="0" lang="ko-KR" altLang="en-US">
                 <a:solidFill>
                   <a:srgbClr val="1E2A30"/>
                 </a:solidFill>
@@ -7985,7 +7985,7 @@
               <a:t>③ 안 쓸 반환값은 </a:t>
             </a:r>
             <a:r>
-              <a:rPr sz="2900" b="0">
+              <a:rPr sz="2900" b="0" lang="ko-KR" altLang="en-US">
                 <a:solidFill>
                   <a:srgbClr val="B05C22"/>
                 </a:solidFill>
@@ -8070,7 +8070,7 @@
               </a:lnSpc>
             </a:pPr>
             <a:r>
-              <a:rPr sz="2700" b="0">
+              <a:rPr sz="2700" b="0" lang="ko-KR" altLang="en-US">
                 <a:solidFill>
                   <a:srgbClr val="003956"/>
                 </a:solidFill>
@@ -8111,7 +8111,7 @@
               </a:lnSpc>
             </a:pPr>
             <a:r>
-              <a:rPr sz="2000" b="0">
+              <a:rPr sz="2000" b="0" lang="ko-KR" altLang="en-US">
                 <a:solidFill>
                   <a:srgbClr val="1E2A30"/>
                 </a:solidFill>
@@ -8129,7 +8129,7 @@
               </a:lnSpc>
             </a:pPr>
             <a:r>
-              <a:rPr sz="2000" b="0">
+              <a:rPr sz="2000" b="0" lang="ko-KR" altLang="en-US">
                 <a:solidFill>
                   <a:srgbClr val="1E2A30"/>
                 </a:solidFill>
@@ -8147,7 +8147,7 @@
               </a:lnSpc>
             </a:pPr>
             <a:r>
-              <a:rPr sz="2000" b="0">
+              <a:rPr sz="2000" b="0" lang="ko-KR" altLang="en-US">
                 <a:solidFill>
                   <a:srgbClr val="B05C22"/>
                 </a:solidFill>
@@ -8158,7 +8158,7 @@
               <a:t>import cv2</a:t>
             </a:r>
             <a:r>
-              <a:rPr sz="2000" b="0">
+              <a:rPr sz="2000" b="0" lang="ko-KR" altLang="en-US">
                 <a:solidFill>
                   <a:srgbClr val="1E2A30"/>
                 </a:solidFill>
@@ -8176,7 +8176,7 @@
               </a:lnSpc>
             </a:pPr>
             <a:r>
-              <a:rPr sz="2000" b="0">
+              <a:rPr sz="2000" b="0" lang="ko-KR" altLang="en-US">
                 <a:solidFill>
                   <a:srgbClr val="1E2A30"/>
                 </a:solidFill>
@@ -8259,7 +8259,7 @@
               </a:lnSpc>
             </a:pPr>
             <a:r>
-              <a:rPr sz="2200" b="0">
+              <a:rPr sz="2200" b="0" lang="ko-KR" altLang="en-US">
                 <a:solidFill>
                   <a:srgbClr val="6B7A80"/>
                 </a:solidFill>
@@ -8277,7 +8277,7 @@
               </a:lnSpc>
             </a:pPr>
             <a:r>
-              <a:rPr sz="2200" b="0">
+              <a:rPr sz="2200" b="0" lang="ko-KR" altLang="en-US">
                 <a:solidFill>
                   <a:srgbClr val="6B7A80"/>
                 </a:solidFill>
@@ -8412,7 +8412,7 @@
               </a:lnSpc>
             </a:pPr>
             <a:r>
-              <a:rPr sz="1250" b="0">
+              <a:rPr sz="1250" b="0" lang="ko-KR" altLang="en-US">
                 <a:solidFill>
                   <a:srgbClr val="003956"/>
                 </a:solidFill>
@@ -8430,7 +8430,7 @@
               </a:lnSpc>
             </a:pPr>
             <a:r>
-              <a:rPr sz="1250" b="0">
+              <a:rPr sz="1250" b="0" lang="ko-KR" altLang="en-US">
                 <a:solidFill>
                   <a:srgbClr val="003956"/>
                 </a:solidFill>
@@ -8471,7 +8471,7 @@
               </a:lnSpc>
             </a:pPr>
             <a:r>
-              <a:rPr sz="1600" b="0">
+              <a:rPr sz="1600" b="0" lang="ko-KR" altLang="en-US">
                 <a:solidFill>
                   <a:srgbClr val="96A8A7"/>
                 </a:solidFill>
@@ -8556,7 +8556,7 @@
               </a:lnSpc>
             </a:pPr>
             <a:r>
-              <a:rPr sz="3500" b="0">
+              <a:rPr sz="3500" b="0" lang="ko-KR" altLang="en-US">
                 <a:solidFill>
                   <a:srgbClr val="1E2A30"/>
                 </a:solidFill>
@@ -8639,7 +8639,7 @@
               </a:lnSpc>
             </a:pPr>
             <a:r>
-              <a:rPr sz="2200" b="0">
+              <a:rPr sz="2200" b="0" lang="ko-KR" altLang="en-US">
                 <a:solidFill>
                   <a:srgbClr val="6B7A80"/>
                 </a:solidFill>
@@ -8680,7 +8680,7 @@
               </a:lnSpc>
             </a:pPr>
             <a:r>
-              <a:rPr sz="2100" b="0">
+              <a:rPr sz="2100" b="0" lang="ko-KR" altLang="en-US">
                 <a:solidFill>
                   <a:srgbClr val="6B7A80"/>
                 </a:solidFill>
@@ -8721,7 +8721,7 @@
               </a:lnSpc>
             </a:pPr>
             <a:r>
-              <a:rPr sz="3300" b="0">
+              <a:rPr sz="3300" b="0" lang="ko-KR" altLang="en-US">
                 <a:solidFill>
                   <a:srgbClr val="1E2A30"/>
                 </a:solidFill>
@@ -8732,7 +8732,7 @@
               <a:t>OpenCV-Python의 영상은 </a:t>
             </a:r>
             <a:r>
-              <a:rPr sz="3300" b="0">
+              <a:rPr sz="3300" b="0" lang="ko-KR" altLang="en-US">
                 <a:solidFill>
                   <a:srgbClr val="B05C22"/>
                 </a:solidFill>
@@ -8743,7 +8743,7 @@
               <a:t>넘파이 ndarray 객체</a:t>
             </a:r>
             <a:r>
-              <a:rPr sz="3300" b="0">
+              <a:rPr sz="3300" b="0" lang="ko-KR" altLang="en-US">
                 <a:solidFill>
                   <a:srgbClr val="1E2A30"/>
                 </a:solidFill>
@@ -8828,7 +8828,7 @@
               </a:lnSpc>
             </a:pPr>
             <a:r>
-              <a:rPr sz="1300" b="0">
+              <a:rPr sz="1300" b="0" lang="ko-KR" altLang="en-US">
                 <a:solidFill>
                   <a:srgbClr val="96A8A7"/>
                 </a:solidFill>
@@ -9080,7 +9080,7 @@
               </a:lnSpc>
             </a:pPr>
             <a:r>
-              <a:rPr sz="2700" b="0">
+              <a:rPr sz="2700" b="0" lang="ko-KR" altLang="en-US">
                 <a:solidFill>
                   <a:srgbClr val="003956"/>
                 </a:solidFill>
@@ -9121,7 +9121,7 @@
               </a:lnSpc>
             </a:pPr>
             <a:r>
-              <a:rPr sz="1700" b="0">
+              <a:rPr sz="1700" b="0" lang="ko-KR" altLang="en-US">
                 <a:solidFill>
                   <a:srgbClr val="1E2A30"/>
                 </a:solidFill>
@@ -9132,7 +9132,7 @@
               <a:t>ndarray는 </a:t>
             </a:r>
             <a:r>
-              <a:rPr sz="1700" b="0">
+              <a:rPr sz="1700" b="0" lang="ko-KR" altLang="en-US">
                 <a:solidFill>
                   <a:srgbClr val="B05C22"/>
                 </a:solidFill>
@@ -9150,7 +9150,7 @@
               </a:lnSpc>
             </a:pPr>
             <a:r>
-              <a:rPr sz="1700" b="0">
+              <a:rPr sz="1700" b="0" lang="ko-KR" altLang="en-US">
                 <a:solidFill>
                   <a:srgbClr val="1E2A30"/>
                 </a:solidFill>
@@ -9161,7 +9161,7 @@
               <a:t>연산을 한 번에</a:t>
             </a:r>
             <a:r>
-              <a:rPr sz="1700" b="0">
+              <a:rPr sz="1700" b="0" lang="ko-KR" altLang="en-US">
                 <a:solidFill>
                   <a:srgbClr val="B05C22"/>
                 </a:solidFill>
@@ -9186,7 +9186,7 @@
               </a:lnSpc>
             </a:pPr>
             <a:r>
-              <a:rPr sz="1700" b="0">
+              <a:rPr sz="1700" b="0" lang="ko-KR" altLang="en-US">
                 <a:solidFill>
                   <a:srgbClr val="1E2A30"/>
                 </a:solidFill>
@@ -9204,7 +9204,7 @@
               </a:lnSpc>
             </a:pPr>
             <a:r>
-              <a:rPr sz="1700" b="0">
+              <a:rPr sz="1700" b="0" lang="ko-KR" altLang="en-US">
                 <a:solidFill>
                   <a:srgbClr val="1E2A30"/>
                 </a:solidFill>
@@ -9215,7 +9215,7 @@
               <a:t>image + 100 </a:t>
             </a:r>
             <a:r>
-              <a:rPr sz="1700" b="0">
+              <a:rPr sz="1700" b="0" lang="ko-KR" altLang="en-US">
                 <a:solidFill>
                   <a:srgbClr val="B05C22"/>
                 </a:solidFill>
@@ -9226,7 +9226,7 @@
               <a:t>한 줄</a:t>
             </a:r>
             <a:r>
-              <a:rPr sz="1700" b="0">
+              <a:rPr sz="1700" b="0" lang="ko-KR" altLang="en-US">
                 <a:solidFill>
                   <a:srgbClr val="1E2A30"/>
                 </a:solidFill>
@@ -9251,7 +9251,7 @@
               </a:lnSpc>
             </a:pPr>
             <a:r>
-              <a:rPr sz="1700" b="0">
+              <a:rPr sz="1700" b="0" lang="ko-KR" altLang="en-US">
                 <a:solidFill>
                   <a:srgbClr val="1E2A30"/>
                 </a:solidFill>
@@ -9269,7 +9269,7 @@
               </a:lnSpc>
             </a:pPr>
             <a:r>
-              <a:rPr sz="1700" b="0">
+              <a:rPr sz="1700" b="0" lang="ko-KR" altLang="en-US">
                 <a:solidFill>
                   <a:srgbClr val="1E2A30"/>
                 </a:solidFill>
@@ -9354,7 +9354,7 @@
               </a:lnSpc>
             </a:pPr>
             <a:r>
-              <a:rPr sz="1600" b="0">
+              <a:rPr sz="1600" b="0" lang="ko-KR" altLang="en-US">
                 <a:solidFill>
                   <a:srgbClr val="003956"/>
                 </a:solidFill>
@@ -9395,7 +9395,7 @@
               </a:lnSpc>
             </a:pPr>
             <a:r>
-              <a:rPr sz="1300" b="0">
+              <a:rPr sz="1300" b="0" lang="ko-KR" altLang="en-US">
                 <a:solidFill>
                   <a:srgbClr val="1E2A30"/>
                 </a:solidFill>
@@ -9406,7 +9406,7 @@
               <a:t>정수 배열과 실수 배열을 섞어 계산하면 결과는 </a:t>
             </a:r>
             <a:r>
-              <a:rPr sz="1300" b="0">
+              <a:rPr sz="1300" b="0" lang="ko-KR" altLang="en-US">
                 <a:solidFill>
                   <a:srgbClr val="B05C22"/>
                 </a:solidFill>
@@ -9417,7 +9417,7 @@
               <a:t>float64로 승격</a:t>
             </a:r>
             <a:r>
-              <a:rPr sz="1300" b="0">
+              <a:rPr sz="1300" b="0" lang="ko-KR" altLang="en-US">
                 <a:solidFill>
                   <a:srgbClr val="1E2A30"/>
                 </a:solidFill>
@@ -9500,7 +9500,7 @@
               </a:lnSpc>
             </a:pPr>
             <a:r>
-              <a:rPr sz="2200" b="0">
+              <a:rPr sz="2200" b="0" lang="ko-KR" altLang="en-US">
                 <a:solidFill>
                   <a:srgbClr val="6B7A80"/>
                 </a:solidFill>
@@ -9635,7 +9635,7 @@
               </a:lnSpc>
             </a:pPr>
             <a:r>
-              <a:rPr sz="1250" b="0">
+              <a:rPr sz="1250" b="0" lang="ko-KR" altLang="en-US">
                 <a:solidFill>
                   <a:srgbClr val="003956"/>
                 </a:solidFill>
@@ -9653,7 +9653,7 @@
               </a:lnSpc>
             </a:pPr>
             <a:r>
-              <a:rPr sz="1250" b="0">
+              <a:rPr sz="1250" b="0" lang="ko-KR" altLang="en-US">
                 <a:solidFill>
                   <a:srgbClr val="003956"/>
                 </a:solidFill>
@@ -9694,7 +9694,7 @@
               </a:lnSpc>
             </a:pPr>
             <a:r>
-              <a:rPr sz="1600" b="0">
+              <a:rPr sz="1600" b="0" lang="ko-KR" altLang="en-US">
                 <a:solidFill>
                   <a:srgbClr val="96A8A7"/>
                 </a:solidFill>
@@ -9779,7 +9779,7 @@
               </a:lnSpc>
             </a:pPr>
             <a:r>
-              <a:rPr sz="3500" b="0">
+              <a:rPr sz="3500" b="0" lang="ko-KR" altLang="en-US">
                 <a:solidFill>
                   <a:srgbClr val="1E2A30"/>
                 </a:solidFill>
@@ -9862,7 +9862,7 @@
               </a:lnSpc>
             </a:pPr>
             <a:r>
-              <a:rPr sz="2200" b="0">
+              <a:rPr sz="2200" b="0" lang="ko-KR" altLang="en-US">
                 <a:solidFill>
                   <a:srgbClr val="6B7A80"/>
                 </a:solidFill>
@@ -9903,7 +9903,7 @@
               </a:lnSpc>
             </a:pPr>
             <a:r>
-              <a:rPr sz="2100" b="0">
+              <a:rPr sz="2100" b="0" lang="ko-KR" altLang="en-US">
                 <a:solidFill>
                   <a:srgbClr val="6B7A80"/>
                 </a:solidFill>
@@ -9988,7 +9988,7 @@
               </a:lnSpc>
             </a:pPr>
             <a:r>
-              <a:rPr sz="1300" b="0">
+              <a:rPr sz="1300" b="0" lang="ko-KR" altLang="en-US">
                 <a:solidFill>
                   <a:srgbClr val="96A8A7"/>
                 </a:solidFill>
@@ -10294,7 +10294,7 @@
               </a:lnSpc>
             </a:pPr>
             <a:r>
-              <a:rPr sz="2700" b="0">
+              <a:rPr sz="2700" b="0" lang="ko-KR" altLang="en-US">
                 <a:solidFill>
                   <a:srgbClr val="003956"/>
                 </a:solidFill>
@@ -10335,7 +10335,7 @@
               </a:lnSpc>
             </a:pPr>
             <a:r>
-              <a:rPr sz="2000" b="0">
+              <a:rPr sz="2000" b="0" lang="ko-KR" altLang="en-US">
                 <a:solidFill>
                   <a:srgbClr val="1E2A30"/>
                 </a:solidFill>
@@ -10353,7 +10353,7 @@
               </a:lnSpc>
             </a:pPr>
             <a:r>
-              <a:rPr sz="2000" b="0">
+              <a:rPr sz="2000" b="0" lang="ko-KR" altLang="en-US">
                 <a:solidFill>
                   <a:srgbClr val="1E2A30"/>
                 </a:solidFill>
@@ -10378,7 +10378,7 @@
               </a:lnSpc>
             </a:pPr>
             <a:r>
-              <a:rPr sz="2000" b="0">
+              <a:rPr sz="2000" b="0" lang="ko-KR" altLang="en-US">
                 <a:solidFill>
                   <a:srgbClr val="B05C22"/>
                 </a:solidFill>
@@ -10465,7 +10465,7 @@
               </a:lnSpc>
             </a:pPr>
             <a:r>
-              <a:rPr sz="2600" b="0">
+              <a:rPr sz="2600" b="0" lang="ko-KR" altLang="en-US">
                 <a:solidFill>
                   <a:srgbClr val="C1662F"/>
                 </a:solidFill>
@@ -10506,7 +10506,7 @@
               </a:lnSpc>
             </a:pPr>
             <a:r>
-              <a:rPr sz="1800" b="0">
+              <a:rPr sz="1800" b="0" lang="ko-KR" altLang="en-US">
                 <a:solidFill>
                   <a:srgbClr val="1E2A30"/>
                 </a:solidFill>
@@ -10524,7 +10524,7 @@
               </a:lnSpc>
             </a:pPr>
             <a:r>
-              <a:rPr sz="1800" b="0">
+              <a:rPr sz="1800" b="0" lang="ko-KR" altLang="en-US">
                 <a:solidFill>
                   <a:srgbClr val="1E2A30"/>
                 </a:solidFill>
@@ -10535,7 +10535,7 @@
               <a:t>NumPy 1.24부터 </a:t>
             </a:r>
             <a:r>
-              <a:rPr sz="1800" b="0">
+              <a:rPr sz="1800" b="0" lang="ko-KR" altLang="en-US">
                 <a:solidFill>
                   <a:srgbClr val="B05C22"/>
                 </a:solidFill>
@@ -10546,7 +10546,7 @@
               <a:t>삭제</a:t>
             </a:r>
             <a:r>
-              <a:rPr sz="1800" b="0">
+              <a:rPr sz="1800" b="0" lang="ko-KR" altLang="en-US">
                 <a:solidFill>
                   <a:srgbClr val="1E2A30"/>
                 </a:solidFill>
@@ -10571,7 +10571,7 @@
               </a:lnSpc>
             </a:pPr>
             <a:r>
-              <a:rPr sz="1800" b="0">
+              <a:rPr sz="1800" b="0" lang="ko-KR" altLang="en-US">
                 <a:solidFill>
                   <a:srgbClr val="1E2A30"/>
                 </a:solidFill>
@@ -10582,7 +10582,7 @@
               <a:t>지금은 </a:t>
             </a:r>
             <a:r>
-              <a:rPr sz="1800" b="0">
+              <a:rPr sz="1800" b="0" lang="ko-KR" altLang="en-US">
                 <a:solidFill>
                   <a:srgbClr val="B05C22"/>
                 </a:solidFill>
@@ -10600,7 +10600,7 @@
               </a:lnSpc>
             </a:pPr>
             <a:r>
-              <a:rPr sz="1800" b="0">
+              <a:rPr sz="1800" b="0" lang="ko-KR" altLang="en-US">
                 <a:solidFill>
                   <a:srgbClr val="1E2A30"/>
                 </a:solidFill>
@@ -10611,7 +10611,7 @@
               <a:t>np.float64</a:t>
             </a:r>
             <a:r>
-              <a:rPr sz="1800" b="0">
+              <a:rPr sz="1800" b="0" lang="ko-KR" altLang="en-US">
                 <a:solidFill>
                   <a:srgbClr val="B05C22"/>
                 </a:solidFill>
@@ -10629,7 +10629,7 @@
               </a:lnSpc>
             </a:pPr>
             <a:r>
-              <a:rPr sz="1800" b="0">
+              <a:rPr sz="1800" b="0" lang="ko-KR" altLang="en-US">
                 <a:solidFill>
                   <a:srgbClr val="1E2A30"/>
                 </a:solidFill>
@@ -10712,7 +10712,7 @@
               </a:lnSpc>
             </a:pPr>
             <a:r>
-              <a:rPr sz="2200" b="0">
+              <a:rPr sz="2200" b="0" lang="ko-KR" altLang="en-US">
                 <a:solidFill>
                   <a:srgbClr val="6B7A80"/>
                 </a:solidFill>
@@ -10730,7 +10730,7 @@
               </a:lnSpc>
             </a:pPr>
             <a:r>
-              <a:rPr sz="2200" b="0">
+              <a:rPr sz="2200" b="0" lang="ko-KR" altLang="en-US">
                 <a:solidFill>
                   <a:srgbClr val="6B7A80"/>
                 </a:solidFill>
@@ -10865,7 +10865,7 @@
               </a:lnSpc>
             </a:pPr>
             <a:r>
-              <a:rPr sz="1250" b="0">
+              <a:rPr sz="1250" b="0" lang="ko-KR" altLang="en-US">
                 <a:solidFill>
                   <a:srgbClr val="003956"/>
                 </a:solidFill>
@@ -10883,7 +10883,7 @@
               </a:lnSpc>
             </a:pPr>
             <a:r>
-              <a:rPr sz="1250" b="0">
+              <a:rPr sz="1250" b="0" lang="ko-KR" altLang="en-US">
                 <a:solidFill>
                   <a:srgbClr val="003956"/>
                 </a:solidFill>
@@ -10924,7 +10924,7 @@
               </a:lnSpc>
             </a:pPr>
             <a:r>
-              <a:rPr sz="1600" b="0">
+              <a:rPr sz="1600" b="0" lang="ko-KR" altLang="en-US">
                 <a:solidFill>
                   <a:srgbClr val="96A8A7"/>
                 </a:solidFill>
@@ -11009,7 +11009,7 @@
               </a:lnSpc>
             </a:pPr>
             <a:r>
-              <a:rPr sz="3500" b="0">
+              <a:rPr sz="3500" b="0" lang="ko-KR" altLang="en-US">
                 <a:solidFill>
                   <a:srgbClr val="1E2A30"/>
                 </a:solidFill>
@@ -11092,7 +11092,7 @@
               </a:lnSpc>
             </a:pPr>
             <a:r>
-              <a:rPr sz="2200" b="0">
+              <a:rPr sz="2200" b="0" lang="ko-KR" altLang="en-US">
                 <a:solidFill>
                   <a:srgbClr val="6B7A80"/>
                 </a:solidFill>
@@ -11133,7 +11133,7 @@
               </a:lnSpc>
             </a:pPr>
             <a:r>
-              <a:rPr sz="2100" b="0">
+              <a:rPr sz="2100" b="0" lang="ko-KR" altLang="en-US">
                 <a:solidFill>
                   <a:srgbClr val="6B7A80"/>
                 </a:solidFill>
@@ -11260,7 +11260,7 @@
               </a:lnSpc>
             </a:pPr>
             <a:r>
-              <a:rPr sz="1300" b="0">
+              <a:rPr sz="1300" b="0" lang="ko-KR" altLang="en-US">
                 <a:solidFill>
                   <a:srgbClr val="C1662F"/>
                 </a:solidFill>
@@ -11494,7 +11494,7 @@
               </a:lnSpc>
             </a:pPr>
             <a:r>
-              <a:rPr sz="2700" b="0">
+              <a:rPr sz="2700" b="0" lang="ko-KR" altLang="en-US">
                 <a:solidFill>
                   <a:srgbClr val="003956"/>
                 </a:solidFill>
@@ -11535,7 +11535,7 @@
               </a:lnSpc>
             </a:pPr>
             <a:r>
-              <a:rPr sz="2700" b="0">
+              <a:rPr sz="2700" b="0" lang="ko-KR" altLang="en-US">
                 <a:solidFill>
                   <a:srgbClr val="1E2A30"/>
                 </a:solidFill>
@@ -11546,7 +11546,7 @@
               <a:t>대괄호가 </a:t>
             </a:r>
             <a:r>
-              <a:rPr sz="2700" b="0">
+              <a:rPr sz="2700" b="0" lang="ko-KR" altLang="en-US">
                 <a:solidFill>
                   <a:srgbClr val="B05C22"/>
                 </a:solidFill>
@@ -11557,7 +11557,7 @@
               <a:t>두 겹</a:t>
             </a:r>
             <a:r>
-              <a:rPr sz="2700" b="0">
+              <a:rPr sz="2700" b="0" lang="ko-KR" altLang="en-US">
                 <a:solidFill>
                   <a:srgbClr val="1E2A30"/>
                 </a:solidFill>
@@ -11575,7 +11575,7 @@
               </a:lnSpc>
             </a:pPr>
             <a:r>
-              <a:rPr sz="2700" b="0">
+              <a:rPr sz="2700" b="0" lang="ko-KR" altLang="en-US">
                 <a:solidFill>
                   <a:srgbClr val="1E2A30"/>
                 </a:solidFill>
@@ -11600,7 +11600,7 @@
               </a:lnSpc>
             </a:pPr>
             <a:r>
-              <a:rPr sz="2700" b="0">
+              <a:rPr sz="2700" b="0" lang="ko-KR" altLang="en-US">
                 <a:solidFill>
                   <a:srgbClr val="1E2A30"/>
                 </a:solidFill>
@@ -11618,7 +11618,7 @@
               </a:lnSpc>
             </a:pPr>
             <a:r>
-              <a:rPr sz="2700" b="0">
+              <a:rPr sz="2700" b="0" lang="ko-KR" altLang="en-US">
                 <a:solidFill>
                   <a:srgbClr val="1E2A30"/>
                 </a:solidFill>
@@ -11703,7 +11703,7 @@
               </a:lnSpc>
             </a:pPr>
             <a:r>
-              <a:rPr sz="2400" b="0">
+              <a:rPr sz="2400" b="0" lang="ko-KR" altLang="en-US">
                 <a:solidFill>
                   <a:srgbClr val="003956"/>
                 </a:solidFill>
@@ -11744,7 +11744,7 @@
               </a:lnSpc>
             </a:pPr>
             <a:r>
-              <a:rPr sz="1800" b="0">
+              <a:rPr sz="1700" b="0" lang="ko-KR" altLang="en-US">
                 <a:solidFill>
                   <a:srgbClr val="1E2A30"/>
                 </a:solidFill>
@@ -11827,7 +11827,7 @@
               </a:lnSpc>
             </a:pPr>
             <a:r>
-              <a:rPr sz="2200" b="0">
+              <a:rPr sz="2200" b="0" lang="ko-KR" altLang="en-US">
                 <a:solidFill>
                   <a:srgbClr val="6B7A80"/>
                 </a:solidFill>
@@ -11962,7 +11962,7 @@
               </a:lnSpc>
             </a:pPr>
             <a:r>
-              <a:rPr sz="1250" b="0">
+              <a:rPr sz="1250" b="0" lang="ko-KR" altLang="en-US">
                 <a:solidFill>
                   <a:srgbClr val="003956"/>
                 </a:solidFill>
@@ -11980,7 +11980,7 @@
               </a:lnSpc>
             </a:pPr>
             <a:r>
-              <a:rPr sz="1250" b="0">
+              <a:rPr sz="1250" b="0" lang="ko-KR" altLang="en-US">
                 <a:solidFill>
                   <a:srgbClr val="003956"/>
                 </a:solidFill>
@@ -12021,7 +12021,7 @@
               </a:lnSpc>
             </a:pPr>
             <a:r>
-              <a:rPr sz="1600" b="0">
+              <a:rPr sz="1600" b="0" lang="ko-KR" altLang="en-US">
                 <a:solidFill>
                   <a:srgbClr val="96A8A7"/>
                 </a:solidFill>
@@ -12106,7 +12106,7 @@
               </a:lnSpc>
             </a:pPr>
             <a:r>
-              <a:rPr sz="3500" b="0">
+              <a:rPr sz="3500" b="0" lang="ko-KR" altLang="en-US">
                 <a:solidFill>
                   <a:srgbClr val="1E2A30"/>
                 </a:solidFill>
@@ -12189,7 +12189,7 @@
               </a:lnSpc>
             </a:pPr>
             <a:r>
-              <a:rPr sz="2200" b="0">
+              <a:rPr sz="2200" b="0" lang="ko-KR" altLang="en-US">
                 <a:solidFill>
                   <a:srgbClr val="6B7A80"/>
                 </a:solidFill>
@@ -12230,7 +12230,7 @@
               </a:lnSpc>
             </a:pPr>
             <a:r>
-              <a:rPr sz="2100" b="0">
+              <a:rPr sz="2100" b="0" lang="ko-KR" altLang="en-US">
                 <a:solidFill>
                   <a:srgbClr val="6B7A80"/>
                 </a:solidFill>
@@ -12315,7 +12315,7 @@
               </a:lnSpc>
             </a:pPr>
             <a:r>
-              <a:rPr sz="4500" b="0">
+              <a:rPr sz="4500" b="0" lang="ko-KR" altLang="en-US">
                 <a:solidFill>
                   <a:srgbClr val="B05C22"/>
                 </a:solidFill>
@@ -12356,7 +12356,7 @@
               </a:lnSpc>
             </a:pPr>
             <a:r>
-              <a:rPr sz="2800" b="0">
+              <a:rPr sz="2800" b="0" lang="ko-KR" altLang="en-US">
                 <a:solidFill>
                   <a:srgbClr val="1E2A30"/>
                 </a:solidFill>
@@ -12441,7 +12441,7 @@
               </a:lnSpc>
             </a:pPr>
             <a:r>
-              <a:rPr sz="4500" b="0">
+              <a:rPr sz="4500" b="0" lang="ko-KR" altLang="en-US">
                 <a:solidFill>
                   <a:srgbClr val="B05C22"/>
                 </a:solidFill>
@@ -12482,7 +12482,7 @@
               </a:lnSpc>
             </a:pPr>
             <a:r>
-              <a:rPr sz="2800" b="0">
+              <a:rPr sz="2800" b="0" lang="ko-KR" altLang="en-US">
                 <a:solidFill>
                   <a:srgbClr val="1E2A30"/>
                 </a:solidFill>
@@ -12567,7 +12567,7 @@
               </a:lnSpc>
             </a:pPr>
             <a:r>
-              <a:rPr sz="4500" b="0">
+              <a:rPr sz="4500" b="0" lang="ko-KR" altLang="en-US">
                 <a:solidFill>
                   <a:srgbClr val="B05C22"/>
                 </a:solidFill>
@@ -12608,7 +12608,7 @@
               </a:lnSpc>
             </a:pPr>
             <a:r>
-              <a:rPr sz="2800" b="0">
+              <a:rPr sz="2800" b="0" lang="ko-KR" altLang="en-US">
                 <a:solidFill>
                   <a:srgbClr val="1E2A30"/>
                 </a:solidFill>
@@ -12693,7 +12693,7 @@
               </a:lnSpc>
             </a:pPr>
             <a:r>
-              <a:rPr sz="4500" b="0">
+              <a:rPr sz="4500" b="0" lang="ko-KR" altLang="en-US">
                 <a:solidFill>
                   <a:srgbClr val="B05C22"/>
                 </a:solidFill>
@@ -12734,7 +12734,7 @@
               </a:lnSpc>
             </a:pPr>
             <a:r>
-              <a:rPr sz="2800" b="0">
+              <a:rPr sz="2800" b="0" lang="ko-KR" altLang="en-US">
                 <a:solidFill>
                   <a:srgbClr val="1E2A30"/>
                 </a:solidFill>
@@ -12869,7 +12869,7 @@
               </a:lnSpc>
             </a:pPr>
             <a:r>
-              <a:rPr sz="1250" b="0">
+              <a:rPr sz="1250" b="0" lang="ko-KR" altLang="en-US">
                 <a:solidFill>
                   <a:srgbClr val="003956"/>
                 </a:solidFill>
@@ -12887,7 +12887,7 @@
               </a:lnSpc>
             </a:pPr>
             <a:r>
-              <a:rPr sz="1250" b="0">
+              <a:rPr sz="1250" b="0" lang="ko-KR" altLang="en-US">
                 <a:solidFill>
                   <a:srgbClr val="003956"/>
                 </a:solidFill>
@@ -12928,7 +12928,7 @@
               </a:lnSpc>
             </a:pPr>
             <a:r>
-              <a:rPr sz="1600" b="0">
+              <a:rPr sz="1600" b="0" lang="ko-KR" altLang="en-US">
                 <a:solidFill>
                   <a:srgbClr val="96A8A7"/>
                 </a:solidFill>
@@ -13013,7 +13013,7 @@
               </a:lnSpc>
             </a:pPr>
             <a:r>
-              <a:rPr sz="3500" b="0">
+              <a:rPr sz="3500" b="0" lang="ko-KR" altLang="en-US">
                 <a:solidFill>
                   <a:srgbClr val="1E2A30"/>
                 </a:solidFill>
@@ -13096,7 +13096,7 @@
               </a:lnSpc>
             </a:pPr>
             <a:r>
-              <a:rPr sz="2100" b="0">
+              <a:rPr sz="2100" b="0" lang="ko-KR" altLang="en-US">
                 <a:solidFill>
                   <a:srgbClr val="6B7A80"/>
                 </a:solidFill>
@@ -13181,7 +13181,7 @@
               </a:lnSpc>
             </a:pPr>
             <a:r>
-              <a:rPr sz="2200" b="0">
+              <a:rPr sz="2200" b="0" lang="ko-KR" altLang="en-US">
                 <a:solidFill>
                   <a:srgbClr val="FFFFFF"/>
                 </a:solidFill>
@@ -13222,7 +13222,7 @@
               </a:lnSpc>
             </a:pPr>
             <a:r>
-              <a:rPr sz="2200" b="0">
+              <a:rPr sz="2200" b="0" lang="ko-KR" altLang="en-US">
                 <a:solidFill>
                   <a:srgbClr val="1E2A30"/>
                 </a:solidFill>
@@ -13233,7 +13233,7 @@
               <a:t>교재는 </a:t>
             </a:r>
             <a:r>
-              <a:rPr sz="2200" b="0">
+              <a:rPr sz="2200" b="0" lang="ko-KR" altLang="en-US">
                 <a:solidFill>
                   <a:srgbClr val="B05C22"/>
                 </a:solidFill>
@@ -13244,7 +13244,7 @@
               <a:t>수업 진도에 맞춘 참고용</a:t>
             </a:r>
             <a:r>
-              <a:rPr sz="2200" b="0">
+              <a:rPr sz="2200" b="0" lang="ko-KR" altLang="en-US">
                 <a:solidFill>
                   <a:srgbClr val="1E2A30"/>
                 </a:solidFill>
@@ -13329,7 +13329,7 @@
               </a:lnSpc>
             </a:pPr>
             <a:r>
-              <a:rPr sz="2200" b="0">
+              <a:rPr sz="2200" b="0" lang="ko-KR" altLang="en-US">
                 <a:solidFill>
                   <a:srgbClr val="FFFFFF"/>
                 </a:solidFill>
@@ -13370,7 +13370,7 @@
               </a:lnSpc>
             </a:pPr>
             <a:r>
-              <a:rPr sz="2100" b="0">
+              <a:rPr sz="2100" b="0" lang="ko-KR" altLang="en-US">
                 <a:solidFill>
                   <a:srgbClr val="1E2A30"/>
                 </a:solidFill>
@@ -13381,7 +13381,7 @@
               <a:t>교재의 그림·내용 일부를 </a:t>
             </a:r>
             <a:r>
-              <a:rPr sz="2100" b="0">
+              <a:rPr sz="2100" b="0" lang="ko-KR" altLang="en-US">
                 <a:solidFill>
                   <a:srgbClr val="B05C22"/>
                 </a:solidFill>
@@ -13392,7 +13392,7 @@
               <a:t>저작권법 제28조(공표된 저작물의 인용)</a:t>
             </a:r>
             <a:r>
-              <a:rPr sz="2100" b="0">
+              <a:rPr sz="2100" b="0" lang="ko-KR" altLang="en-US">
                 <a:solidFill>
                   <a:srgbClr val="1E2A30"/>
                 </a:solidFill>
@@ -13477,7 +13477,7 @@
               </a:lnSpc>
             </a:pPr>
             <a:r>
-              <a:rPr sz="2200" b="0">
+              <a:rPr sz="2200" b="0" lang="ko-KR" altLang="en-US">
                 <a:solidFill>
                   <a:srgbClr val="FFFFFF"/>
                 </a:solidFill>
@@ -13518,7 +13518,7 @@
               </a:lnSpc>
             </a:pPr>
             <a:r>
-              <a:rPr sz="2900" b="0">
+              <a:rPr sz="2100" b="0" lang="ko-KR" altLang="en-US">
                 <a:solidFill>
                   <a:srgbClr val="1E2A30"/>
                 </a:solidFill>
@@ -13526,10 +13526,10 @@
                 <a:ea typeface="프리젠테이션 5 Medium"/>
                 <a:cs typeface="프리젠테이션 5 Medium"/>
               </a:rPr>
-              <a:t>도표·그래프·예시 그림은 교재 것을 쓰지 않고 </a:t>
-            </a:r>
-            <a:r>
-              <a:rPr sz="2900" b="0">
+              <a:t>도표·그래프·예시 그림은 </a:t>
+            </a:r>
+            <a:r>
+              <a:rPr sz="2100" b="0" lang="ko-KR" altLang="en-US">
                 <a:solidFill>
                   <a:srgbClr val="B05C22"/>
                 </a:solidFill>
@@ -13537,10 +13537,10 @@
                 <a:ea typeface="프리젠테이션 5 Medium"/>
                 <a:cs typeface="프리젠테이션 5 Medium"/>
               </a:rPr>
-              <a:t>전부 직접 제작</a:t>
-            </a:r>
-            <a:r>
-              <a:rPr sz="2900" b="0">
+              <a:t>직접 제작</a:t>
+            </a:r>
+            <a:r>
+              <a:rPr sz="2100" b="0" lang="ko-KR" altLang="en-US">
                 <a:solidFill>
                   <a:srgbClr val="1E2A30"/>
                 </a:solidFill>
@@ -13548,7 +13548,7 @@
                 <a:ea typeface="프리젠테이션 5 Medium"/>
                 <a:cs typeface="프리젠테이션 5 Medium"/>
               </a:rPr>
-              <a:t>했다</a:t>
+              <a:t>하는 것을 원칙으로 하고, 교재 그림을 그대로 쓴 경우에는 캡션에 인용임을 밝혔다</a:t>
             </a:r>
           </a:p>
         </p:txBody>
@@ -13627,7 +13627,7 @@
               </a:lnSpc>
             </a:pPr>
             <a:r>
-              <a:rPr sz="2600" b="0">
+              <a:rPr sz="2600" b="0" lang="ko-KR" altLang="en-US">
                 <a:solidFill>
                   <a:srgbClr val="C1662F"/>
                 </a:solidFill>
@@ -13668,7 +13668,7 @@
               </a:lnSpc>
             </a:pPr>
             <a:r>
-              <a:rPr sz="1900" b="0">
+              <a:rPr sz="1900" b="0" lang="ko-KR" altLang="en-US">
                 <a:solidFill>
                   <a:srgbClr val="1E2A30"/>
                 </a:solidFill>
@@ -13679,7 +13679,7 @@
               <a:t>이 자료는 </a:t>
             </a:r>
             <a:r>
-              <a:rPr sz="1900" b="0">
+              <a:rPr sz="1900" b="0" lang="ko-KR" altLang="en-US">
                 <a:solidFill>
                   <a:srgbClr val="B05C22"/>
                 </a:solidFill>
@@ -13690,7 +13690,7 @@
               <a:t>대학원 개인 학습·연구 목적</a:t>
             </a:r>
             <a:r>
-              <a:rPr sz="1900" b="0">
+              <a:rPr sz="1900" b="0" lang="ko-KR" altLang="en-US">
                 <a:solidFill>
                   <a:srgbClr val="1E2A30"/>
                 </a:solidFill>
@@ -13708,7 +13708,7 @@
               </a:lnSpc>
             </a:pPr>
             <a:r>
-              <a:rPr sz="1900" b="0">
+              <a:rPr sz="1900" b="0" lang="ko-KR" altLang="en-US">
                 <a:solidFill>
                   <a:srgbClr val="1E2A30"/>
                 </a:solidFill>
@@ -13793,7 +13793,7 @@
               </a:lnSpc>
             </a:pPr>
             <a:r>
-              <a:rPr sz="2700" b="0">
+              <a:rPr sz="2700" b="0" lang="ko-KR" altLang="en-US">
                 <a:solidFill>
                   <a:srgbClr val="003956"/>
                 </a:solidFill>
@@ -13834,7 +13834,7 @@
               </a:lnSpc>
             </a:pPr>
             <a:r>
-              <a:rPr sz="2300" b="0">
+              <a:rPr sz="2200" b="0" lang="ko-KR" altLang="en-US">
                 <a:solidFill>
                   <a:srgbClr val="1E2A30"/>
                 </a:solidFill>
@@ -13842,7 +13842,7 @@
                 <a:ea typeface="프리젠테이션 5 Medium"/>
                 <a:cs typeface="프리젠테이션 5 Medium"/>
               </a:rPr>
-              <a:t>정성환·배종욱, 『OpenCV-Python으로 배우는 영상 처리 및 응용』, 생능출판사  ·  수업 자료(CH01~03)</a:t>
+              <a:t>정성환·배종욱, 『OpenCV-Python으로 배우는 영상 처리 및 응용』, 생능출판사  ·  수업 자료(CH01~04)</a:t>
             </a:r>
           </a:p>
         </p:txBody>
@@ -13901,7 +13901,7 @@
               </a:lnSpc>
             </a:pPr>
             <a:r>
-              <a:rPr sz="10100" b="0">
+              <a:rPr sz="10100" b="0" lang="ko-KR" altLang="en-US">
                 <a:solidFill>
                   <a:srgbClr val="2E5A75"/>
                 </a:solidFill>
@@ -13984,7 +13984,7 @@
               </a:lnSpc>
             </a:pPr>
             <a:r>
-              <a:rPr sz="5500" b="0">
+              <a:rPr sz="5500" b="0" lang="ko-KR" altLang="en-US">
                 <a:solidFill>
                   <a:srgbClr val="FFFFFF"/>
                 </a:solidFill>
@@ -14025,7 +14025,7 @@
               </a:lnSpc>
             </a:pPr>
             <a:r>
-              <a:rPr sz="2600" b="0">
+              <a:rPr sz="2600" b="0" lang="ko-KR" altLang="en-US">
                 <a:solidFill>
                   <a:srgbClr val="96A8A7"/>
                 </a:solidFill>
@@ -14066,7 +14066,7 @@
               </a:lnSpc>
             </a:pPr>
             <a:r>
-              <a:rPr sz="2600" b="0">
+              <a:rPr sz="2600" b="0" lang="ko-KR" altLang="en-US">
                 <a:solidFill>
                   <a:srgbClr val="B9C8D2"/>
                 </a:solidFill>
@@ -14107,7 +14107,7 @@
               </a:lnSpc>
             </a:pPr>
             <a:r>
-              <a:rPr sz="2600" b="0">
+              <a:rPr sz="2600" b="0" lang="ko-KR" altLang="en-US">
                 <a:solidFill>
                   <a:srgbClr val="B9C8D2"/>
                 </a:solidFill>
@@ -14148,7 +14148,7 @@
               </a:lnSpc>
             </a:pPr>
             <a:r>
-              <a:rPr sz="2600" b="0">
+              <a:rPr sz="2600" b="0" lang="ko-KR" altLang="en-US">
                 <a:solidFill>
                   <a:srgbClr val="B9C8D2"/>
                 </a:solidFill>
@@ -14283,7 +14283,7 @@
               </a:lnSpc>
             </a:pPr>
             <a:r>
-              <a:rPr sz="1250" b="0">
+              <a:rPr sz="1250" b="0" lang="ko-KR" altLang="en-US">
                 <a:solidFill>
                   <a:srgbClr val="003956"/>
                 </a:solidFill>
@@ -14301,7 +14301,7 @@
               </a:lnSpc>
             </a:pPr>
             <a:r>
-              <a:rPr sz="1250" b="0">
+              <a:rPr sz="1250" b="0" lang="ko-KR" altLang="en-US">
                 <a:solidFill>
                   <a:srgbClr val="003956"/>
                 </a:solidFill>
@@ -14342,7 +14342,7 @@
               </a:lnSpc>
             </a:pPr>
             <a:r>
-              <a:rPr sz="1600" b="0">
+              <a:rPr sz="1600" b="0" lang="ko-KR" altLang="en-US">
                 <a:solidFill>
                   <a:srgbClr val="96A8A7"/>
                 </a:solidFill>
@@ -14427,7 +14427,7 @@
               </a:lnSpc>
             </a:pPr>
             <a:r>
-              <a:rPr sz="3500" b="0">
+              <a:rPr sz="3500" b="0" lang="ko-KR" altLang="en-US">
                 <a:solidFill>
                   <a:srgbClr val="1E2A30"/>
                 </a:solidFill>
@@ -14510,7 +14510,7 @@
               </a:lnSpc>
             </a:pPr>
             <a:r>
-              <a:rPr sz="2200" b="0">
+              <a:rPr sz="2200" b="0" lang="ko-KR" altLang="en-US">
                 <a:solidFill>
                   <a:srgbClr val="6B7A80"/>
                 </a:solidFill>
@@ -14551,7 +14551,7 @@
               </a:lnSpc>
             </a:pPr>
             <a:r>
-              <a:rPr sz="2100" b="0">
+              <a:rPr sz="2100" b="0" lang="ko-KR" altLang="en-US">
                 <a:solidFill>
                   <a:srgbClr val="6B7A80"/>
                 </a:solidFill>
@@ -14636,7 +14636,7 @@
               </a:lnSpc>
             </a:pPr>
             <a:r>
-              <a:rPr sz="2200" b="0">
+              <a:rPr sz="2200" b="0" lang="ko-KR" altLang="en-US">
                 <a:solidFill>
                   <a:srgbClr val="FFFFFF"/>
                 </a:solidFill>
@@ -14677,7 +14677,7 @@
               </a:lnSpc>
             </a:pPr>
             <a:r>
-              <a:rPr sz="2900" b="0">
+              <a:rPr sz="2900" b="0" lang="ko-KR" altLang="en-US">
                 <a:solidFill>
                   <a:srgbClr val="1E2A30"/>
                 </a:solidFill>
@@ -14688,7 +14688,7 @@
               <a:t>OpenCV에 필요한 </a:t>
             </a:r>
             <a:r>
-              <a:rPr sz="2900" b="0">
+              <a:rPr sz="2900" b="0" lang="ko-KR" altLang="en-US">
                 <a:solidFill>
                   <a:srgbClr val="B05C22"/>
                 </a:solidFill>
@@ -14699,7 +14699,7 @@
               <a:t>파이썬 문법 최소 세트</a:t>
             </a:r>
             <a:r>
-              <a:rPr sz="2900" b="0">
+              <a:rPr sz="2900" b="0" lang="ko-KR" altLang="en-US">
                 <a:solidFill>
                   <a:srgbClr val="1E2A30"/>
                 </a:solidFill>
@@ -14784,7 +14784,7 @@
               </a:lnSpc>
             </a:pPr>
             <a:r>
-              <a:rPr sz="2200" b="0">
+              <a:rPr sz="2200" b="0" lang="ko-KR" altLang="en-US">
                 <a:solidFill>
                   <a:srgbClr val="FFFFFF"/>
                 </a:solidFill>
@@ -14825,7 +14825,7 @@
               </a:lnSpc>
             </a:pPr>
             <a:r>
-              <a:rPr sz="2900" b="0">
+              <a:rPr sz="2900" b="0" lang="ko-KR" altLang="en-US">
                 <a:solidFill>
                   <a:srgbClr val="1E2A30"/>
                 </a:solidFill>
@@ -14910,7 +14910,7 @@
               </a:lnSpc>
             </a:pPr>
             <a:r>
-              <a:rPr sz="2200" b="0">
+              <a:rPr sz="2200" b="0" lang="ko-KR" altLang="en-US">
                 <a:solidFill>
                   <a:srgbClr val="FFFFFF"/>
                 </a:solidFill>
@@ -14951,7 +14951,7 @@
               </a:lnSpc>
             </a:pPr>
             <a:r>
-              <a:rPr sz="2900" b="0">
+              <a:rPr sz="2900" b="0" lang="ko-KR" altLang="en-US">
                 <a:solidFill>
                   <a:srgbClr val="B05C22"/>
                 </a:solidFill>
@@ -14962,7 +14962,7 @@
               <a:t>넘파이 ndarray</a:t>
             </a:r>
             <a:r>
-              <a:rPr sz="2900" b="0">
+              <a:rPr sz="2900" b="0" lang="ko-KR" altLang="en-US">
                 <a:solidFill>
                   <a:srgbClr val="1E2A30"/>
                 </a:solidFill>
@@ -15047,7 +15047,7 @@
               </a:lnSpc>
             </a:pPr>
             <a:r>
-              <a:rPr sz="2700" b="0">
+              <a:rPr sz="2700" b="0" lang="ko-KR" altLang="en-US">
                 <a:solidFill>
                   <a:srgbClr val="003956"/>
                 </a:solidFill>
@@ -15088,7 +15088,7 @@
               </a:lnSpc>
             </a:pPr>
             <a:r>
-              <a:rPr sz="2900" b="0">
+              <a:rPr sz="2900" b="0" lang="ko-KR" altLang="en-US">
                 <a:solidFill>
                   <a:srgbClr val="1E2A30"/>
                 </a:solidFill>
@@ -15099,7 +15099,7 @@
               <a:t>3장은 사실상 </a:t>
             </a:r>
             <a:r>
-              <a:rPr sz="2900" b="0">
+              <a:rPr sz="2900" b="0" lang="ko-KR" altLang="en-US">
                 <a:solidFill>
                   <a:srgbClr val="B05C22"/>
                 </a:solidFill>
@@ -15110,7 +15110,7 @@
               <a:t>'영상을 담을 그릇 만드는 법'</a:t>
             </a:r>
             <a:r>
-              <a:rPr sz="2900" b="0">
+              <a:rPr sz="2900" b="0" lang="ko-KR" altLang="en-US">
                 <a:solidFill>
                   <a:srgbClr val="1E2A30"/>
                 </a:solidFill>
@@ -15128,7 +15128,7 @@
               </a:lnSpc>
             </a:pPr>
             <a:r>
-              <a:rPr sz="2900" b="0">
+              <a:rPr sz="2900" b="0" lang="ko-KR" altLang="en-US">
                 <a:solidFill>
                   <a:srgbClr val="1E2A30"/>
                 </a:solidFill>
@@ -15263,7 +15263,7 @@
               </a:lnSpc>
             </a:pPr>
             <a:r>
-              <a:rPr sz="1250" b="0">
+              <a:rPr sz="1250" b="0" lang="ko-KR" altLang="en-US">
                 <a:solidFill>
                   <a:srgbClr val="003956"/>
                 </a:solidFill>
@@ -15281,7 +15281,7 @@
               </a:lnSpc>
             </a:pPr>
             <a:r>
-              <a:rPr sz="1250" b="0">
+              <a:rPr sz="1250" b="0" lang="ko-KR" altLang="en-US">
                 <a:solidFill>
                   <a:srgbClr val="003956"/>
                 </a:solidFill>
@@ -15322,7 +15322,7 @@
               </a:lnSpc>
             </a:pPr>
             <a:r>
-              <a:rPr sz="1600" b="0">
+              <a:rPr sz="1600" b="0" lang="ko-KR" altLang="en-US">
                 <a:solidFill>
                   <a:srgbClr val="96A8A7"/>
                 </a:solidFill>
@@ -15407,7 +15407,7 @@
               </a:lnSpc>
             </a:pPr>
             <a:r>
-              <a:rPr sz="3500" b="0">
+              <a:rPr sz="3500" b="0" lang="ko-KR" altLang="en-US">
                 <a:solidFill>
                   <a:srgbClr val="1E2A30"/>
                 </a:solidFill>
@@ -15490,7 +15490,7 @@
               </a:lnSpc>
             </a:pPr>
             <a:r>
-              <a:rPr sz="2200" b="0">
+              <a:rPr sz="2200" b="0" lang="ko-KR" altLang="en-US">
                 <a:solidFill>
                   <a:srgbClr val="6B7A80"/>
                 </a:solidFill>
@@ -15531,7 +15531,7 @@
               </a:lnSpc>
             </a:pPr>
             <a:r>
-              <a:rPr sz="2100" b="0">
+              <a:rPr sz="2100" b="0" lang="ko-KR" altLang="en-US">
                 <a:solidFill>
                   <a:srgbClr val="6B7A80"/>
                 </a:solidFill>
@@ -15612,11 +15612,11 @@
           <a:p>
             <a:pPr algn="ctr">
               <a:lnSpc>
-                <a:spcPct val="125000"/>
-              </a:lnSpc>
-            </a:pPr>
-            <a:r>
-              <a:rPr sz="2500" b="0">
+                <a:spcPct val="115000"/>
+              </a:lnSpc>
+            </a:pPr>
+            <a:r>
+              <a:rPr sz="2500" b="0" lang="ko-KR" altLang="en-US">
                 <a:solidFill>
                   <a:srgbClr val="B05C22"/>
                 </a:solidFill>
@@ -15653,11 +15653,11 @@
           <a:p>
             <a:pPr algn="ctr">
               <a:lnSpc>
-                <a:spcPct val="125000"/>
-              </a:lnSpc>
-            </a:pPr>
-            <a:r>
-              <a:rPr sz="2500" b="0">
+                <a:spcPct val="115000"/>
+              </a:lnSpc>
+            </a:pPr>
+            <a:r>
+              <a:rPr sz="2500" b="0" lang="ko-KR" altLang="en-US">
                 <a:solidFill>
                   <a:srgbClr val="B05C22"/>
                 </a:solidFill>
@@ -15694,11 +15694,11 @@
           <a:p>
             <a:pPr algn="ctr">
               <a:lnSpc>
-                <a:spcPct val="125000"/>
-              </a:lnSpc>
-            </a:pPr>
-            <a:r>
-              <a:rPr sz="2500" b="0">
+                <a:spcPct val="115000"/>
+              </a:lnSpc>
+            </a:pPr>
+            <a:r>
+              <a:rPr sz="2500" b="0" lang="ko-KR" altLang="en-US">
                 <a:solidFill>
                   <a:srgbClr val="B05C22"/>
                 </a:solidFill>
@@ -15783,7 +15783,7 @@
               </a:lnSpc>
             </a:pPr>
             <a:r>
-              <a:rPr sz="2500" b="0">
+              <a:rPr sz="2500" b="0" lang="ko-KR" altLang="en-US">
                 <a:solidFill>
                   <a:srgbClr val="1E2A30"/>
                 </a:solidFill>
@@ -15824,7 +15824,7 @@
               </a:lnSpc>
             </a:pPr>
             <a:r>
-              <a:rPr sz="2500" b="0">
+              <a:rPr sz="2500" b="0" lang="ko-KR" altLang="en-US">
                 <a:solidFill>
                   <a:srgbClr val="1E2A30"/>
                 </a:solidFill>
@@ -15865,7 +15865,7 @@
               </a:lnSpc>
             </a:pPr>
             <a:r>
-              <a:rPr sz="2100" b="0">
+              <a:rPr sz="2100" b="0" lang="ko-KR" altLang="en-US">
                 <a:solidFill>
                   <a:srgbClr val="1E2A30"/>
                 </a:solidFill>
@@ -15906,7 +15906,7 @@
               </a:lnSpc>
             </a:pPr>
             <a:r>
-              <a:rPr sz="2500" b="0">
+              <a:rPr sz="2500" b="0" lang="ko-KR" altLang="en-US">
                 <a:solidFill>
                   <a:srgbClr val="1E2A30"/>
                 </a:solidFill>
@@ -15947,7 +15947,7 @@
               </a:lnSpc>
             </a:pPr>
             <a:r>
-              <a:rPr sz="2400" b="0">
+              <a:rPr sz="2400" b="0" lang="ko-KR" altLang="en-US">
                 <a:solidFill>
                   <a:srgbClr val="1E2A30"/>
                 </a:solidFill>
@@ -15988,7 +15988,7 @@
               </a:lnSpc>
             </a:pPr>
             <a:r>
-              <a:rPr sz="2500" b="0">
+              <a:rPr sz="2500" b="0" lang="ko-KR" altLang="en-US">
                 <a:solidFill>
                   <a:srgbClr val="1E2A30"/>
                 </a:solidFill>
@@ -16073,7 +16073,7 @@
               </a:lnSpc>
             </a:pPr>
             <a:r>
-              <a:rPr sz="2500" b="0">
+              <a:rPr sz="2500" b="0" lang="ko-KR" altLang="en-US">
                 <a:solidFill>
                   <a:srgbClr val="1E2A30"/>
                 </a:solidFill>
@@ -16114,7 +16114,7 @@
               </a:lnSpc>
             </a:pPr>
             <a:r>
-              <a:rPr sz="2100" b="0">
+              <a:rPr sz="2100" b="0" lang="ko-KR" altLang="en-US">
                 <a:solidFill>
                   <a:srgbClr val="1E2A30"/>
                 </a:solidFill>
@@ -16155,7 +16155,7 @@
               </a:lnSpc>
             </a:pPr>
             <a:r>
-              <a:rPr sz="2500" b="0">
+              <a:rPr sz="2500" b="0" lang="ko-KR" altLang="en-US">
                 <a:solidFill>
                   <a:srgbClr val="1E2A30"/>
                 </a:solidFill>
@@ -16240,7 +16240,7 @@
               </a:lnSpc>
             </a:pPr>
             <a:r>
-              <a:rPr sz="2700" b="0">
+              <a:rPr sz="2700" b="0" lang="ko-KR" altLang="en-US">
                 <a:solidFill>
                   <a:srgbClr val="003956"/>
                 </a:solidFill>
@@ -16281,7 +16281,7 @@
               </a:lnSpc>
             </a:pPr>
             <a:r>
-              <a:rPr sz="1300" b="0">
+              <a:rPr sz="1300" b="0" lang="ko-KR" altLang="en-US">
                 <a:solidFill>
                   <a:srgbClr val="1E2A30"/>
                 </a:solidFill>
@@ -16306,7 +16306,7 @@
               </a:lnSpc>
             </a:pPr>
             <a:r>
-              <a:rPr sz="1300" b="0">
+              <a:rPr sz="1300" b="0" lang="ko-KR" altLang="en-US">
                 <a:solidFill>
                   <a:srgbClr val="1E2A30"/>
                 </a:solidFill>
@@ -16324,7 +16324,7 @@
               </a:lnSpc>
             </a:pPr>
             <a:r>
-              <a:rPr sz="1300" b="0">
+              <a:rPr sz="1300" b="0" lang="ko-KR" altLang="en-US">
                 <a:solidFill>
                   <a:srgbClr val="1E2A30"/>
                 </a:solidFill>
@@ -16349,7 +16349,7 @@
               </a:lnSpc>
             </a:pPr>
             <a:r>
-              <a:rPr sz="1300" b="0">
+              <a:rPr sz="1300" b="0" lang="ko-KR" altLang="en-US">
                 <a:solidFill>
                   <a:srgbClr val="1E2A30"/>
                 </a:solidFill>
@@ -16434,7 +16434,7 @@
               </a:lnSpc>
             </a:pPr>
             <a:r>
-              <a:rPr sz="2700" b="0">
+              <a:rPr sz="2700" b="0" lang="ko-KR" altLang="en-US">
                 <a:solidFill>
                   <a:srgbClr val="003956"/>
                 </a:solidFill>
@@ -16475,7 +16475,7 @@
               </a:lnSpc>
             </a:pPr>
             <a:r>
-              <a:rPr sz="1300" b="0">
+              <a:rPr sz="1300" b="0" lang="ko-KR" altLang="en-US">
                 <a:solidFill>
                   <a:srgbClr val="1E2A30"/>
                 </a:solidFill>
@@ -16500,7 +16500,7 @@
               </a:lnSpc>
             </a:pPr>
             <a:r>
-              <a:rPr sz="1300" b="0">
+              <a:rPr sz="1300" b="0" lang="ko-KR" altLang="en-US">
                 <a:solidFill>
                   <a:srgbClr val="1E2A30"/>
                 </a:solidFill>
@@ -16511,7 +16511,7 @@
               <a:t>int(3.14) → </a:t>
             </a:r>
             <a:r>
-              <a:rPr sz="1300" b="0">
+              <a:rPr sz="1300" b="0" lang="ko-KR" altLang="en-US">
                 <a:solidFill>
                   <a:srgbClr val="B05C22"/>
                 </a:solidFill>
@@ -16536,7 +16536,7 @@
               </a:lnSpc>
             </a:pPr>
             <a:r>
-              <a:rPr sz="1300" b="0">
+              <a:rPr sz="1300" b="0" lang="ko-KR" altLang="en-US">
                 <a:solidFill>
                   <a:srgbClr val="1E2A30"/>
                 </a:solidFill>
@@ -16547,7 +16547,7 @@
               <a:t>반올림이 아니라 </a:t>
             </a:r>
             <a:r>
-              <a:rPr sz="1300" b="0">
+              <a:rPr sz="1300" b="0" lang="ko-KR" altLang="en-US">
                 <a:solidFill>
                   <a:srgbClr val="B05C22"/>
                 </a:solidFill>
@@ -16558,7 +16558,7 @@
               <a:t>버림</a:t>
             </a:r>
             <a:r>
-              <a:rPr sz="1300" b="0">
+              <a:rPr sz="1300" b="0" lang="ko-KR" altLang="en-US">
                 <a:solidFill>
                   <a:srgbClr val="1E2A30"/>
                 </a:solidFill>
@@ -16576,7 +16576,7 @@
               </a:lnSpc>
             </a:pPr>
             <a:r>
-              <a:rPr sz="1300" b="0">
+              <a:rPr sz="1300" b="0" lang="ko-KR" altLang="en-US">
                 <a:solidFill>
                   <a:srgbClr val="1E2A30"/>
                 </a:solidFill>
@@ -16659,7 +16659,7 @@
               </a:lnSpc>
             </a:pPr>
             <a:r>
-              <a:rPr sz="2200" b="0">
+              <a:rPr sz="2200" b="0" lang="ko-KR" altLang="en-US">
                 <a:solidFill>
                   <a:srgbClr val="6B7A80"/>
                 </a:solidFill>
@@ -16794,7 +16794,7 @@
               </a:lnSpc>
             </a:pPr>
             <a:r>
-              <a:rPr sz="1250" b="0">
+              <a:rPr sz="1250" b="0" lang="ko-KR" altLang="en-US">
                 <a:solidFill>
                   <a:srgbClr val="003956"/>
                 </a:solidFill>
@@ -16812,7 +16812,7 @@
               </a:lnSpc>
             </a:pPr>
             <a:r>
-              <a:rPr sz="1250" b="0">
+              <a:rPr sz="1250" b="0" lang="ko-KR" altLang="en-US">
                 <a:solidFill>
                   <a:srgbClr val="003956"/>
                 </a:solidFill>
@@ -16853,7 +16853,7 @@
               </a:lnSpc>
             </a:pPr>
             <a:r>
-              <a:rPr sz="1600" b="0">
+              <a:rPr sz="1600" b="0" lang="ko-KR" altLang="en-US">
                 <a:solidFill>
                   <a:srgbClr val="96A8A7"/>
                 </a:solidFill>
@@ -16938,7 +16938,7 @@
               </a:lnSpc>
             </a:pPr>
             <a:r>
-              <a:rPr sz="3500" b="0">
+              <a:rPr sz="3500" b="0" lang="ko-KR" altLang="en-US">
                 <a:solidFill>
                   <a:srgbClr val="1E2A30"/>
                 </a:solidFill>
@@ -17021,7 +17021,7 @@
               </a:lnSpc>
             </a:pPr>
             <a:r>
-              <a:rPr sz="2200" b="0">
+              <a:rPr sz="2200" b="0" lang="ko-KR" altLang="en-US">
                 <a:solidFill>
                   <a:srgbClr val="6B7A80"/>
                 </a:solidFill>
@@ -17062,7 +17062,7 @@
               </a:lnSpc>
             </a:pPr>
             <a:r>
-              <a:rPr sz="2100" b="0">
+              <a:rPr sz="2100" b="0" lang="ko-KR" altLang="en-US">
                 <a:solidFill>
                   <a:srgbClr val="6B7A80"/>
                 </a:solidFill>
@@ -17143,11 +17143,11 @@
           <a:p>
             <a:pPr algn="ctr">
               <a:lnSpc>
-                <a:spcPct val="125000"/>
-              </a:lnSpc>
-            </a:pPr>
-            <a:r>
-              <a:rPr sz="2500" b="0">
+                <a:spcPct val="115000"/>
+              </a:lnSpc>
+            </a:pPr>
+            <a:r>
+              <a:rPr sz="2500" b="0" lang="ko-KR" altLang="en-US">
                 <a:solidFill>
                   <a:srgbClr val="B05C22"/>
                 </a:solidFill>
@@ -17184,11 +17184,11 @@
           <a:p>
             <a:pPr algn="ctr">
               <a:lnSpc>
-                <a:spcPct val="125000"/>
-              </a:lnSpc>
-            </a:pPr>
-            <a:r>
-              <a:rPr sz="2500" b="0">
+                <a:spcPct val="115000"/>
+              </a:lnSpc>
+            </a:pPr>
+            <a:r>
+              <a:rPr sz="2500" b="0" lang="ko-KR" altLang="en-US">
                 <a:solidFill>
                   <a:srgbClr val="B05C22"/>
                 </a:solidFill>
@@ -17225,11 +17225,11 @@
           <a:p>
             <a:pPr algn="ctr">
               <a:lnSpc>
-                <a:spcPct val="125000"/>
-              </a:lnSpc>
-            </a:pPr>
-            <a:r>
-              <a:rPr sz="2500" b="0">
+                <a:spcPct val="115000"/>
+              </a:lnSpc>
+            </a:pPr>
+            <a:r>
+              <a:rPr sz="2500" b="0" lang="ko-KR" altLang="en-US">
                 <a:solidFill>
                   <a:srgbClr val="B05C22"/>
                 </a:solidFill>
@@ -17314,7 +17314,7 @@
               </a:lnSpc>
             </a:pPr>
             <a:r>
-              <a:rPr sz="2500" b="0">
+              <a:rPr sz="2500" b="0" lang="ko-KR" altLang="en-US">
                 <a:solidFill>
                   <a:srgbClr val="1E2A30"/>
                 </a:solidFill>
@@ -17355,7 +17355,7 @@
               </a:lnSpc>
             </a:pPr>
             <a:r>
-              <a:rPr sz="2500" b="0">
+              <a:rPr sz="2500" b="0" lang="ko-KR" altLang="en-US">
                 <a:solidFill>
                   <a:srgbClr val="1E2A30"/>
                 </a:solidFill>
@@ -17396,7 +17396,7 @@
               </a:lnSpc>
             </a:pPr>
             <a:r>
-              <a:rPr sz="2500" b="0">
+              <a:rPr sz="2500" b="0" lang="ko-KR" altLang="en-US">
                 <a:solidFill>
                   <a:srgbClr val="1E2A30"/>
                 </a:solidFill>
@@ -17437,7 +17437,7 @@
               </a:lnSpc>
             </a:pPr>
             <a:r>
-              <a:rPr sz="2500" b="0">
+              <a:rPr sz="2500" b="0" lang="ko-KR" altLang="en-US">
                 <a:solidFill>
                   <a:srgbClr val="1E2A30"/>
                 </a:solidFill>
@@ -17478,7 +17478,7 @@
               </a:lnSpc>
             </a:pPr>
             <a:r>
-              <a:rPr sz="2500" b="0">
+              <a:rPr sz="2500" b="0" lang="ko-KR" altLang="en-US">
                 <a:solidFill>
                   <a:srgbClr val="1E2A30"/>
                 </a:solidFill>
@@ -17519,7 +17519,7 @@
               </a:lnSpc>
             </a:pPr>
             <a:r>
-              <a:rPr sz="2500" b="0">
+              <a:rPr sz="2500" b="0" lang="ko-KR" altLang="en-US">
                 <a:solidFill>
                   <a:srgbClr val="1E2A30"/>
                 </a:solidFill>
@@ -17604,7 +17604,7 @@
               </a:lnSpc>
             </a:pPr>
             <a:r>
-              <a:rPr sz="2500" b="0">
+              <a:rPr sz="2500" b="0" lang="ko-KR" altLang="en-US">
                 <a:solidFill>
                   <a:srgbClr val="1E2A30"/>
                 </a:solidFill>
@@ -17645,7 +17645,7 @@
               </a:lnSpc>
             </a:pPr>
             <a:r>
-              <a:rPr sz="2500" b="0">
+              <a:rPr sz="2500" b="0" lang="ko-KR" altLang="en-US">
                 <a:solidFill>
                   <a:srgbClr val="1E2A30"/>
                 </a:solidFill>
@@ -17686,7 +17686,7 @@
               </a:lnSpc>
             </a:pPr>
             <a:r>
-              <a:rPr sz="2500" b="0">
+              <a:rPr sz="2500" b="0" lang="ko-KR" altLang="en-US">
                 <a:solidFill>
                   <a:srgbClr val="1E2A30"/>
                 </a:solidFill>
@@ -17727,7 +17727,7 @@
               </a:lnSpc>
             </a:pPr>
             <a:r>
-              <a:rPr sz="2500" b="0">
+              <a:rPr sz="2500" b="0" lang="ko-KR" altLang="en-US">
                 <a:solidFill>
                   <a:srgbClr val="1E2A30"/>
                 </a:solidFill>
@@ -17768,7 +17768,7 @@
               </a:lnSpc>
             </a:pPr>
             <a:r>
-              <a:rPr sz="2500" b="0">
+              <a:rPr sz="2500" b="0" lang="ko-KR" altLang="en-US">
                 <a:solidFill>
                   <a:srgbClr val="1E2A30"/>
                 </a:solidFill>
@@ -17809,7 +17809,7 @@
               </a:lnSpc>
             </a:pPr>
             <a:r>
-              <a:rPr sz="2500" b="0">
+              <a:rPr sz="2500" b="0" lang="ko-KR" altLang="en-US">
                 <a:solidFill>
                   <a:srgbClr val="1E2A30"/>
                 </a:solidFill>
@@ -17894,7 +17894,7 @@
               </a:lnSpc>
             </a:pPr>
             <a:r>
-              <a:rPr sz="2500" b="0">
+              <a:rPr sz="2500" b="0" lang="ko-KR" altLang="en-US">
                 <a:solidFill>
                   <a:srgbClr val="1E2A30"/>
                 </a:solidFill>
@@ -17935,7 +17935,7 @@
               </a:lnSpc>
             </a:pPr>
             <a:r>
-              <a:rPr sz="2500" b="0">
+              <a:rPr sz="2500" b="0" lang="ko-KR" altLang="en-US">
                 <a:solidFill>
                   <a:srgbClr val="1E2A30"/>
                 </a:solidFill>
@@ -17976,7 +17976,7 @@
               </a:lnSpc>
             </a:pPr>
             <a:r>
-              <a:rPr sz="2500" b="0">
+              <a:rPr sz="2300" b="0" lang="ko-KR" altLang="en-US">
                 <a:solidFill>
                   <a:srgbClr val="1E2A30"/>
                 </a:solidFill>
@@ -18061,7 +18061,7 @@
               </a:lnSpc>
             </a:pPr>
             <a:r>
-              <a:rPr sz="2700" b="0">
+              <a:rPr sz="2700" b="0" lang="ko-KR" altLang="en-US">
                 <a:solidFill>
                   <a:srgbClr val="003956"/>
                 </a:solidFill>
@@ -18102,7 +18102,7 @@
               </a:lnSpc>
             </a:pPr>
             <a:r>
-              <a:rPr sz="1900" b="0">
+              <a:rPr sz="1900" b="0" lang="ko-KR" altLang="en-US">
                 <a:solidFill>
                   <a:srgbClr val="1E2A30"/>
                 </a:solidFill>
@@ -18113,7 +18113,7 @@
               <a:t>변수의 자료형은 </a:t>
             </a:r>
             <a:r>
-              <a:rPr sz="1900" b="0">
+              <a:rPr sz="1900" b="0" lang="ko-KR" altLang="en-US">
                 <a:solidFill>
                   <a:srgbClr val="B05C22"/>
                 </a:solidFill>
@@ -18124,7 +18124,7 @@
               <a:t>어떤 리터럴이 담기느냐</a:t>
             </a:r>
             <a:r>
-              <a:rPr sz="1900" b="0">
+              <a:rPr sz="1900" b="0" lang="ko-KR" altLang="en-US">
                 <a:solidFill>
                   <a:srgbClr val="1E2A30"/>
                 </a:solidFill>
@@ -18142,7 +18142,7 @@
               </a:lnSpc>
             </a:pPr>
             <a:r>
-              <a:rPr sz="1900" b="0">
+              <a:rPr sz="1900" b="0" lang="ko-KR" altLang="en-US">
                 <a:solidFill>
                   <a:srgbClr val="1E2A30"/>
                 </a:solidFill>
@@ -18225,7 +18225,7 @@
               </a:lnSpc>
             </a:pPr>
             <a:r>
-              <a:rPr sz="2200" b="0">
+              <a:rPr sz="2200" b="0" lang="ko-KR" altLang="en-US">
                 <a:solidFill>
                   <a:srgbClr val="6B7A80"/>
                 </a:solidFill>
@@ -18360,7 +18360,7 @@
               </a:lnSpc>
             </a:pPr>
             <a:r>
-              <a:rPr sz="1250" b="0">
+              <a:rPr sz="1250" b="0" lang="ko-KR" altLang="en-US">
                 <a:solidFill>
                   <a:srgbClr val="003956"/>
                 </a:solidFill>
@@ -18378,7 +18378,7 @@
               </a:lnSpc>
             </a:pPr>
             <a:r>
-              <a:rPr sz="1250" b="0">
+              <a:rPr sz="1250" b="0" lang="ko-KR" altLang="en-US">
                 <a:solidFill>
                   <a:srgbClr val="003956"/>
                 </a:solidFill>
@@ -18419,7 +18419,7 @@
               </a:lnSpc>
             </a:pPr>
             <a:r>
-              <a:rPr sz="1600" b="0">
+              <a:rPr sz="1600" b="0" lang="ko-KR" altLang="en-US">
                 <a:solidFill>
                   <a:srgbClr val="96A8A7"/>
                 </a:solidFill>
@@ -18504,7 +18504,7 @@
               </a:lnSpc>
             </a:pPr>
             <a:r>
-              <a:rPr sz="3500" b="0">
+              <a:rPr sz="3500" b="0" lang="ko-KR" altLang="en-US">
                 <a:solidFill>
                   <a:srgbClr val="1E2A30"/>
                 </a:solidFill>
@@ -18587,7 +18587,7 @@
               </a:lnSpc>
             </a:pPr>
             <a:r>
-              <a:rPr sz="2200" b="0">
+              <a:rPr sz="2200" b="0" lang="ko-KR" altLang="en-US">
                 <a:solidFill>
                   <a:srgbClr val="6B7A80"/>
                 </a:solidFill>
@@ -18628,7 +18628,7 @@
               </a:lnSpc>
             </a:pPr>
             <a:r>
-              <a:rPr sz="2100" b="0">
+              <a:rPr sz="2100" b="0" lang="ko-KR" altLang="en-US">
                 <a:solidFill>
                   <a:srgbClr val="6B7A80"/>
                 </a:solidFill>
@@ -18713,7 +18713,7 @@
               </a:lnSpc>
             </a:pPr>
             <a:r>
-              <a:rPr sz="2600" b="0">
+              <a:rPr sz="2600" b="0" lang="ko-KR" altLang="en-US">
                 <a:solidFill>
                   <a:srgbClr val="1E2A30"/>
                 </a:solidFill>
@@ -18754,7 +18754,7 @@
               </a:lnSpc>
             </a:pPr>
             <a:r>
-              <a:rPr sz="2600" b="0">
+              <a:rPr sz="2600" b="0" lang="ko-KR" altLang="en-US">
                 <a:solidFill>
                   <a:srgbClr val="1E2A30"/>
                 </a:solidFill>
@@ -18795,7 +18795,7 @@
               </a:lnSpc>
             </a:pPr>
             <a:r>
-              <a:rPr sz="2500" b="0">
+              <a:rPr sz="2500" b="0" lang="ko-KR" altLang="en-US">
                 <a:solidFill>
                   <a:srgbClr val="6B7A80"/>
                 </a:solidFill>
@@ -18880,7 +18880,7 @@
               </a:lnSpc>
             </a:pPr>
             <a:r>
-              <a:rPr sz="2600" b="0">
+              <a:rPr sz="2600" b="0" lang="ko-KR" altLang="en-US">
                 <a:solidFill>
                   <a:srgbClr val="1E2A30"/>
                 </a:solidFill>
@@ -18921,7 +18921,7 @@
               </a:lnSpc>
             </a:pPr>
             <a:r>
-              <a:rPr sz="2600" b="0">
+              <a:rPr sz="2600" b="0" lang="ko-KR" altLang="en-US">
                 <a:solidFill>
                   <a:srgbClr val="1E2A30"/>
                 </a:solidFill>
@@ -18962,7 +18962,7 @@
               </a:lnSpc>
             </a:pPr>
             <a:r>
-              <a:rPr sz="2500" b="0">
+              <a:rPr sz="2500" b="0" lang="ko-KR" altLang="en-US">
                 <a:solidFill>
                   <a:srgbClr val="6B7A80"/>
                 </a:solidFill>
@@ -19047,7 +19047,7 @@
               </a:lnSpc>
             </a:pPr>
             <a:r>
-              <a:rPr sz="2600" b="0">
+              <a:rPr sz="2600" b="0" lang="ko-KR" altLang="en-US">
                 <a:solidFill>
                   <a:srgbClr val="1E2A30"/>
                 </a:solidFill>
@@ -19088,7 +19088,7 @@
               </a:lnSpc>
             </a:pPr>
             <a:r>
-              <a:rPr sz="2600" b="0">
+              <a:rPr sz="2600" b="0" lang="ko-KR" altLang="en-US">
                 <a:solidFill>
                   <a:srgbClr val="1E2A30"/>
                 </a:solidFill>
@@ -19129,7 +19129,7 @@
               </a:lnSpc>
             </a:pPr>
             <a:r>
-              <a:rPr sz="2500" b="0">
+              <a:rPr sz="2500" b="0" lang="ko-KR" altLang="en-US">
                 <a:solidFill>
                   <a:srgbClr val="6B7A80"/>
                 </a:solidFill>
@@ -19214,7 +19214,7 @@
               </a:lnSpc>
             </a:pPr>
             <a:r>
-              <a:rPr sz="2600" b="0">
+              <a:rPr sz="2600" b="0" lang="ko-KR" altLang="en-US">
                 <a:solidFill>
                   <a:srgbClr val="1E2A30"/>
                 </a:solidFill>
@@ -19255,7 +19255,7 @@
               </a:lnSpc>
             </a:pPr>
             <a:r>
-              <a:rPr sz="2600" b="0">
+              <a:rPr sz="2600" b="0" lang="ko-KR" altLang="en-US">
                 <a:solidFill>
                   <a:srgbClr val="1E2A30"/>
                 </a:solidFill>
@@ -19296,7 +19296,7 @@
               </a:lnSpc>
             </a:pPr>
             <a:r>
-              <a:rPr sz="2500" b="0">
+              <a:rPr sz="2500" b="0" lang="ko-KR" altLang="en-US">
                 <a:solidFill>
                   <a:srgbClr val="6B7A80"/>
                 </a:solidFill>
@@ -19592,7 +19592,7 @@
               </a:lnSpc>
             </a:pPr>
             <a:r>
-              <a:rPr sz="2700" b="0">
+              <a:rPr sz="2700" b="0" lang="ko-KR" altLang="en-US">
                 <a:solidFill>
                   <a:srgbClr val="003956"/>
                 </a:solidFill>
@@ -19633,7 +19633,7 @@
               </a:lnSpc>
             </a:pPr>
             <a:r>
-              <a:rPr sz="1900" b="0">
+              <a:rPr sz="1900" b="0" lang="ko-KR" altLang="en-US">
                 <a:solidFill>
                   <a:srgbClr val="1E2A30"/>
                 </a:solidFill>
@@ -19651,7 +19651,7 @@
               </a:lnSpc>
             </a:pPr>
             <a:r>
-              <a:rPr sz="1900" b="0">
+              <a:rPr sz="1900" b="0" lang="ko-KR" altLang="en-US">
                 <a:solidFill>
                   <a:srgbClr val="1E2A30"/>
                 </a:solidFill>
@@ -19669,7 +19669,7 @@
               </a:lnSpc>
             </a:pPr>
             <a:r>
-              <a:rPr sz="1900" b="0">
+              <a:rPr sz="1900" b="0" lang="ko-KR" altLang="en-US">
                 <a:solidFill>
                   <a:srgbClr val="B05C22"/>
                 </a:solidFill>
@@ -19680,7 +19680,7 @@
               <a:t>(행, 열) 튜플</a:t>
             </a:r>
             <a:r>
-              <a:rPr sz="1900" b="0">
+              <a:rPr sz="1900" b="0" lang="ko-KR" altLang="en-US">
                 <a:solidFill>
                   <a:srgbClr val="1E2A30"/>
                 </a:solidFill>
@@ -19705,7 +19705,7 @@
               </a:lnSpc>
             </a:pPr>
             <a:r>
-              <a:rPr sz="1900" b="0">
+              <a:rPr sz="1900" b="0" lang="ko-KR" altLang="en-US">
                 <a:solidFill>
                   <a:srgbClr val="1E2A30"/>
                 </a:solidFill>
@@ -19723,7 +19723,7 @@
               </a:lnSpc>
             </a:pPr>
             <a:r>
-              <a:rPr sz="1900" b="0">
+              <a:rPr sz="1900" b="0" lang="ko-KR" altLang="en-US">
                 <a:solidFill>
                   <a:srgbClr val="1E2A30"/>
                 </a:solidFill>
@@ -19806,7 +19806,7 @@
               </a:lnSpc>
             </a:pPr>
             <a:r>
-              <a:rPr sz="2200" b="0">
+              <a:rPr sz="2200" b="0" lang="ko-KR" altLang="en-US">
                 <a:solidFill>
                   <a:srgbClr val="6B7A80"/>
                 </a:solidFill>
@@ -19941,7 +19941,7 @@
               </a:lnSpc>
             </a:pPr>
             <a:r>
-              <a:rPr sz="1250" b="0">
+              <a:rPr sz="1250" b="0" lang="ko-KR" altLang="en-US">
                 <a:solidFill>
                   <a:srgbClr val="003956"/>
                 </a:solidFill>
@@ -19959,7 +19959,7 @@
               </a:lnSpc>
             </a:pPr>
             <a:r>
-              <a:rPr sz="1250" b="0">
+              <a:rPr sz="1250" b="0" lang="ko-KR" altLang="en-US">
                 <a:solidFill>
                   <a:srgbClr val="003956"/>
                 </a:solidFill>
@@ -20000,7 +20000,7 @@
               </a:lnSpc>
             </a:pPr>
             <a:r>
-              <a:rPr sz="1600" b="0">
+              <a:rPr sz="1600" b="0" lang="ko-KR" altLang="en-US">
                 <a:solidFill>
                   <a:srgbClr val="96A8A7"/>
                 </a:solidFill>
@@ -20085,7 +20085,7 @@
               </a:lnSpc>
             </a:pPr>
             <a:r>
-              <a:rPr sz="3500" b="0">
+              <a:rPr sz="3500" b="0" lang="ko-KR" altLang="en-US">
                 <a:solidFill>
                   <a:srgbClr val="1E2A30"/>
                 </a:solidFill>
@@ -20168,7 +20168,7 @@
               </a:lnSpc>
             </a:pPr>
             <a:r>
-              <a:rPr sz="2200" b="0">
+              <a:rPr sz="2200" b="0" lang="ko-KR" altLang="en-US">
                 <a:solidFill>
                   <a:srgbClr val="6B7A80"/>
                 </a:solidFill>
@@ -20209,7 +20209,7 @@
               </a:lnSpc>
             </a:pPr>
             <a:r>
-              <a:rPr sz="2100" b="0">
+              <a:rPr sz="2100" b="0" lang="ko-KR" altLang="en-US">
                 <a:solidFill>
                   <a:srgbClr val="6B7A80"/>
                 </a:solidFill>
@@ -20290,11 +20290,11 @@
           <a:p>
             <a:pPr algn="ctr">
               <a:lnSpc>
-                <a:spcPct val="125000"/>
-              </a:lnSpc>
-            </a:pPr>
-            <a:r>
-              <a:rPr sz="2500" b="0">
+                <a:spcPct val="115000"/>
+              </a:lnSpc>
+            </a:pPr>
+            <a:r>
+              <a:rPr sz="2500" b="0" lang="ko-KR" altLang="en-US">
                 <a:solidFill>
                   <a:srgbClr val="B05C22"/>
                 </a:solidFill>
@@ -20331,11 +20331,11 @@
           <a:p>
             <a:pPr algn="ctr">
               <a:lnSpc>
-                <a:spcPct val="125000"/>
-              </a:lnSpc>
-            </a:pPr>
-            <a:r>
-              <a:rPr sz="2500" b="0">
+                <a:spcPct val="115000"/>
+              </a:lnSpc>
+            </a:pPr>
+            <a:r>
+              <a:rPr sz="2500" b="0" lang="ko-KR" altLang="en-US">
                 <a:solidFill>
                   <a:srgbClr val="B05C22"/>
                 </a:solidFill>
@@ -20372,11 +20372,11 @@
           <a:p>
             <a:pPr algn="ctr">
               <a:lnSpc>
-                <a:spcPct val="125000"/>
-              </a:lnSpc>
-            </a:pPr>
-            <a:r>
-              <a:rPr sz="2500" b="0">
+                <a:spcPct val="115000"/>
+              </a:lnSpc>
+            </a:pPr>
+            <a:r>
+              <a:rPr sz="2500" b="0" lang="ko-KR" altLang="en-US">
                 <a:solidFill>
                   <a:srgbClr val="B05C22"/>
                 </a:solidFill>
@@ -20461,7 +20461,7 @@
               </a:lnSpc>
             </a:pPr>
             <a:r>
-              <a:rPr sz="2500" b="0">
+              <a:rPr sz="2500" b="0" lang="ko-KR" altLang="en-US">
                 <a:solidFill>
                   <a:srgbClr val="1E2A30"/>
                 </a:solidFill>
@@ -20502,7 +20502,7 @@
               </a:lnSpc>
             </a:pPr>
             <a:r>
-              <a:rPr sz="2500" b="0">
+              <a:rPr sz="2500" b="0" lang="ko-KR" altLang="en-US">
                 <a:solidFill>
                   <a:srgbClr val="1E2A30"/>
                 </a:solidFill>
@@ -20543,7 +20543,7 @@
               </a:lnSpc>
             </a:pPr>
             <a:r>
-              <a:rPr sz="2500" b="0">
+              <a:rPr sz="2500" b="0" lang="ko-KR" altLang="en-US">
                 <a:solidFill>
                   <a:srgbClr val="1E2A30"/>
                 </a:solidFill>
@@ -20584,7 +20584,7 @@
               </a:lnSpc>
             </a:pPr>
             <a:r>
-              <a:rPr sz="2500" b="0">
+              <a:rPr sz="2400" b="0" lang="ko-KR" altLang="en-US">
                 <a:solidFill>
                   <a:srgbClr val="1E2A30"/>
                 </a:solidFill>
@@ -20625,7 +20625,7 @@
               </a:lnSpc>
             </a:pPr>
             <a:r>
-              <a:rPr sz="2500" b="0">
+              <a:rPr sz="2400" b="0" lang="ko-KR" altLang="en-US">
                 <a:solidFill>
                   <a:srgbClr val="1E2A30"/>
                 </a:solidFill>
@@ -20666,7 +20666,7 @@
               </a:lnSpc>
             </a:pPr>
             <a:r>
-              <a:rPr sz="2500" b="0">
+              <a:rPr sz="2500" b="0" lang="ko-KR" altLang="en-US">
                 <a:solidFill>
                   <a:srgbClr val="1E2A30"/>
                 </a:solidFill>
@@ -20751,7 +20751,7 @@
               </a:lnSpc>
             </a:pPr>
             <a:r>
-              <a:rPr sz="2500" b="0">
+              <a:rPr sz="2500" b="0" lang="ko-KR" altLang="en-US">
                 <a:solidFill>
                   <a:srgbClr val="1E2A30"/>
                 </a:solidFill>
@@ -20792,7 +20792,7 @@
               </a:lnSpc>
             </a:pPr>
             <a:r>
-              <a:rPr sz="2500" b="0">
+              <a:rPr sz="2500" b="0" lang="ko-KR" altLang="en-US">
                 <a:solidFill>
                   <a:srgbClr val="1E2A30"/>
                 </a:solidFill>
@@ -20833,7 +20833,7 @@
               </a:lnSpc>
             </a:pPr>
             <a:r>
-              <a:rPr sz="2500" b="0">
+              <a:rPr sz="2500" b="0" lang="ko-KR" altLang="en-US">
                 <a:solidFill>
                   <a:srgbClr val="1E2A30"/>
                 </a:solidFill>
@@ -20874,7 +20874,7 @@
               </a:lnSpc>
             </a:pPr>
             <a:r>
-              <a:rPr sz="2500" b="0">
+              <a:rPr sz="2500" b="0" lang="ko-KR" altLang="en-US">
                 <a:solidFill>
                   <a:srgbClr val="1E2A30"/>
                 </a:solidFill>
@@ -20915,7 +20915,7 @@
               </a:lnSpc>
             </a:pPr>
             <a:r>
-              <a:rPr sz="2500" b="0">
+              <a:rPr sz="2500" b="0" lang="ko-KR" altLang="en-US">
                 <a:solidFill>
                   <a:srgbClr val="1E2A30"/>
                 </a:solidFill>
@@ -20956,7 +20956,7 @@
               </a:lnSpc>
             </a:pPr>
             <a:r>
-              <a:rPr sz="2500" b="0">
+              <a:rPr sz="2500" b="0" lang="ko-KR" altLang="en-US">
                 <a:solidFill>
                   <a:srgbClr val="1E2A30"/>
                 </a:solidFill>
@@ -21041,7 +21041,7 @@
               </a:lnSpc>
             </a:pPr>
             <a:r>
-              <a:rPr sz="2700" b="0">
+              <a:rPr sz="2700" b="0" lang="ko-KR" altLang="en-US">
                 <a:solidFill>
                   <a:srgbClr val="003956"/>
                 </a:solidFill>
@@ -21082,7 +21082,7 @@
               </a:lnSpc>
             </a:pPr>
             <a:r>
-              <a:rPr sz="2500" b="0">
+              <a:rPr sz="2400" b="0" lang="ko-KR" altLang="en-US">
                 <a:solidFill>
                   <a:srgbClr val="B05C22"/>
                 </a:solidFill>
@@ -21093,7 +21093,7 @@
               <a:t>물리적 명령행</a:t>
             </a:r>
             <a:r>
-              <a:rPr sz="2500" b="0">
+              <a:rPr sz="2400" b="0" lang="ko-KR" altLang="en-US">
                 <a:solidFill>
                   <a:srgbClr val="1E2A30"/>
                 </a:solidFill>
@@ -21104,7 +21104,7 @@
               <a:t> = 눈에 보이는 한 줄  /  </a:t>
             </a:r>
             <a:r>
-              <a:rPr sz="2500" b="0">
+              <a:rPr sz="2400" b="0" lang="ko-KR" altLang="en-US">
                 <a:solidFill>
                   <a:srgbClr val="B05C22"/>
                 </a:solidFill>
@@ -21115,7 +21115,7 @@
               <a:t>논리적 명령행</a:t>
             </a:r>
             <a:r>
-              <a:rPr sz="2500" b="0">
+              <a:rPr sz="2400" b="0" lang="ko-KR" altLang="en-US">
                 <a:solidFill>
                   <a:srgbClr val="1E2A30"/>
                 </a:solidFill>
@@ -21133,7 +21133,7 @@
               </a:lnSpc>
             </a:pPr>
             <a:r>
-              <a:rPr sz="2500" b="0">
+              <a:rPr sz="2400" b="0" lang="ko-KR" altLang="en-US">
                 <a:solidFill>
                   <a:srgbClr val="1E2A30"/>
                 </a:solidFill>
@@ -21216,7 +21216,7 @@
               </a:lnSpc>
             </a:pPr>
             <a:r>
-              <a:rPr sz="2200" b="0">
+              <a:rPr sz="2200" b="0" lang="ko-KR" altLang="en-US">
                 <a:solidFill>
                   <a:srgbClr val="6B7A80"/>
                 </a:solidFill>
@@ -21351,7 +21351,7 @@
               </a:lnSpc>
             </a:pPr>
             <a:r>
-              <a:rPr sz="1250" b="0">
+              <a:rPr sz="1250" b="0" lang="ko-KR" altLang="en-US">
                 <a:solidFill>
                   <a:srgbClr val="003956"/>
                 </a:solidFill>
@@ -21369,7 +21369,7 @@
               </a:lnSpc>
             </a:pPr>
             <a:r>
-              <a:rPr sz="1250" b="0">
+              <a:rPr sz="1250" b="0" lang="ko-KR" altLang="en-US">
                 <a:solidFill>
                   <a:srgbClr val="003956"/>
                 </a:solidFill>
@@ -21410,7 +21410,7 @@
               </a:lnSpc>
             </a:pPr>
             <a:r>
-              <a:rPr sz="1600" b="0">
+              <a:rPr sz="1600" b="0" lang="ko-KR" altLang="en-US">
                 <a:solidFill>
                   <a:srgbClr val="96A8A7"/>
                 </a:solidFill>
@@ -21495,7 +21495,7 @@
               </a:lnSpc>
             </a:pPr>
             <a:r>
-              <a:rPr sz="3500" b="0">
+              <a:rPr sz="3500" b="0" lang="ko-KR" altLang="en-US">
                 <a:solidFill>
                   <a:srgbClr val="1E2A30"/>
                 </a:solidFill>
@@ -21578,7 +21578,7 @@
               </a:lnSpc>
             </a:pPr>
             <a:r>
-              <a:rPr sz="2200" b="0">
+              <a:rPr sz="2200" b="0" lang="ko-KR" altLang="en-US">
                 <a:solidFill>
                   <a:srgbClr val="6B7A80"/>
                 </a:solidFill>
@@ -21619,7 +21619,7 @@
               </a:lnSpc>
             </a:pPr>
             <a:r>
-              <a:rPr sz="2100" b="0">
+              <a:rPr sz="2100" b="0" lang="ko-KR" altLang="en-US">
                 <a:solidFill>
                   <a:srgbClr val="6B7A80"/>
                 </a:solidFill>
@@ -21700,11 +21700,11 @@
           <a:p>
             <a:pPr algn="ctr">
               <a:lnSpc>
-                <a:spcPct val="125000"/>
-              </a:lnSpc>
-            </a:pPr>
-            <a:r>
-              <a:rPr sz="2500" b="0">
+                <a:spcPct val="115000"/>
+              </a:lnSpc>
+            </a:pPr>
+            <a:r>
+              <a:rPr sz="2500" b="0" lang="ko-KR" altLang="en-US">
                 <a:solidFill>
                   <a:srgbClr val="B05C22"/>
                 </a:solidFill>
@@ -21741,11 +21741,11 @@
           <a:p>
             <a:pPr algn="ctr">
               <a:lnSpc>
-                <a:spcPct val="125000"/>
-              </a:lnSpc>
-            </a:pPr>
-            <a:r>
-              <a:rPr sz="2500" b="0">
+                <a:spcPct val="115000"/>
+              </a:lnSpc>
+            </a:pPr>
+            <a:r>
+              <a:rPr sz="2500" b="0" lang="ko-KR" altLang="en-US">
                 <a:solidFill>
                   <a:srgbClr val="B05C22"/>
                 </a:solidFill>
@@ -21782,11 +21782,11 @@
           <a:p>
             <a:pPr algn="ctr">
               <a:lnSpc>
-                <a:spcPct val="125000"/>
-              </a:lnSpc>
-            </a:pPr>
-            <a:r>
-              <a:rPr sz="2500" b="0">
+                <a:spcPct val="115000"/>
+              </a:lnSpc>
+            </a:pPr>
+            <a:r>
+              <a:rPr sz="2500" b="0" lang="ko-KR" altLang="en-US">
                 <a:solidFill>
                   <a:srgbClr val="B05C22"/>
                 </a:solidFill>
@@ -21871,7 +21871,7 @@
               </a:lnSpc>
             </a:pPr>
             <a:r>
-              <a:rPr sz="2500" b="0">
+              <a:rPr sz="2500" b="0" lang="ko-KR" altLang="en-US">
                 <a:solidFill>
                   <a:srgbClr val="1E2A30"/>
                 </a:solidFill>
@@ -21912,7 +21912,7 @@
               </a:lnSpc>
             </a:pPr>
             <a:r>
-              <a:rPr sz="2500" b="0">
+              <a:rPr sz="2500" b="0" lang="ko-KR" altLang="en-US">
                 <a:solidFill>
                   <a:srgbClr val="1E2A30"/>
                 </a:solidFill>
@@ -21953,7 +21953,7 @@
               </a:lnSpc>
             </a:pPr>
             <a:r>
-              <a:rPr sz="2500" b="0">
+              <a:rPr sz="2500" b="0" lang="ko-KR" altLang="en-US">
                 <a:solidFill>
                   <a:srgbClr val="1E2A30"/>
                 </a:solidFill>
@@ -21994,7 +21994,7 @@
               </a:lnSpc>
             </a:pPr>
             <a:r>
-              <a:rPr sz="2500" b="0">
+              <a:rPr sz="2500" b="0" lang="ko-KR" altLang="en-US">
                 <a:solidFill>
                   <a:srgbClr val="1E2A30"/>
                 </a:solidFill>
@@ -22035,7 +22035,7 @@
               </a:lnSpc>
             </a:pPr>
             <a:r>
-              <a:rPr sz="2500" b="0">
+              <a:rPr sz="2500" b="0" lang="ko-KR" altLang="en-US">
                 <a:solidFill>
                   <a:srgbClr val="1E2A30"/>
                 </a:solidFill>
@@ -22076,7 +22076,7 @@
               </a:lnSpc>
             </a:pPr>
             <a:r>
-              <a:rPr sz="2500" b="0">
+              <a:rPr sz="2500" b="0" lang="ko-KR" altLang="en-US">
                 <a:solidFill>
                   <a:srgbClr val="1E2A30"/>
                 </a:solidFill>
@@ -22161,7 +22161,7 @@
               </a:lnSpc>
             </a:pPr>
             <a:r>
-              <a:rPr sz="2500" b="0">
+              <a:rPr sz="2500" b="0" lang="ko-KR" altLang="en-US">
                 <a:solidFill>
                   <a:srgbClr val="1E2A30"/>
                 </a:solidFill>
@@ -22202,7 +22202,7 @@
               </a:lnSpc>
             </a:pPr>
             <a:r>
-              <a:rPr sz="2500" b="0">
+              <a:rPr sz="2500" b="0" lang="ko-KR" altLang="en-US">
                 <a:solidFill>
                   <a:srgbClr val="1E2A30"/>
                 </a:solidFill>
@@ -22243,7 +22243,7 @@
               </a:lnSpc>
             </a:pPr>
             <a:r>
-              <a:rPr sz="2500" b="0">
+              <a:rPr sz="2500" b="0" lang="ko-KR" altLang="en-US">
                 <a:solidFill>
                   <a:srgbClr val="1E2A30"/>
                 </a:solidFill>
@@ -22314,7 +22314,7 @@
               </a:lnSpc>
             </a:pPr>
             <a:r>
-              <a:rPr sz="2500" b="0">
+              <a:rPr sz="2500" b="0" lang="ko-KR" altLang="en-US">
                 <a:solidFill>
                   <a:srgbClr val="1E2A30"/>
                 </a:solidFill>
@@ -22355,7 +22355,7 @@
               </a:lnSpc>
             </a:pPr>
             <a:r>
-              <a:rPr sz="2500" b="0">
+              <a:rPr sz="2500" b="0" lang="ko-KR" altLang="en-US">
                 <a:solidFill>
                   <a:srgbClr val="1E2A30"/>
                 </a:solidFill>
@@ -22366,7 +22366,7 @@
               <a:t>3 </a:t>
             </a:r>
             <a:r>
-              <a:rPr sz="2500" b="0">
+              <a:rPr sz="2500" b="0" lang="ko-KR" altLang="en-US">
                 <a:solidFill>
                   <a:srgbClr val="B05C22"/>
                 </a:solidFill>
@@ -22451,7 +22451,7 @@
               </a:lnSpc>
             </a:pPr>
             <a:r>
-              <a:rPr sz="2500" b="0">
+              <a:rPr sz="2500" b="0" lang="ko-KR" altLang="en-US">
                 <a:solidFill>
                   <a:srgbClr val="1E2A30"/>
                 </a:solidFill>
@@ -22492,7 +22492,7 @@
               </a:lnSpc>
             </a:pPr>
             <a:r>
-              <a:rPr sz="2000" b="0">
+              <a:rPr sz="2000" b="0" lang="ko-KR" altLang="en-US">
                 <a:solidFill>
                   <a:srgbClr val="1E2A30"/>
                 </a:solidFill>
@@ -22533,7 +22533,7 @@
               </a:lnSpc>
             </a:pPr>
             <a:r>
-              <a:rPr sz="2500" b="0">
+              <a:rPr sz="2500" b="0" lang="ko-KR" altLang="en-US">
                 <a:solidFill>
                   <a:srgbClr val="1E2A30"/>
                 </a:solidFill>
@@ -22618,7 +22618,7 @@
               </a:lnSpc>
             </a:pPr>
             <a:r>
-              <a:rPr sz="2700" b="0">
+              <a:rPr sz="2700" b="0" lang="ko-KR" altLang="en-US">
                 <a:solidFill>
                   <a:srgbClr val="003956"/>
                 </a:solidFill>
@@ -22659,7 +22659,7 @@
               </a:lnSpc>
             </a:pPr>
             <a:r>
-              <a:rPr sz="1900" b="0">
+              <a:rPr sz="1900" b="0" lang="ko-KR" altLang="en-US">
                 <a:solidFill>
                   <a:srgbClr val="1E2A30"/>
                 </a:solidFill>
@@ -22670,7 +22670,7 @@
               <a:t>괄호 → </a:t>
             </a:r>
             <a:r>
-              <a:rPr sz="1900" b="0">
+              <a:rPr sz="1900" b="0" lang="ko-KR" altLang="en-US">
                 <a:solidFill>
                   <a:srgbClr val="B05C22"/>
                 </a:solidFill>
@@ -22688,7 +22688,7 @@
               </a:lnSpc>
             </a:pPr>
             <a:r>
-              <a:rPr sz="1900" b="0">
+              <a:rPr sz="1900" b="0" lang="ko-KR" altLang="en-US">
                 <a:solidFill>
                   <a:srgbClr val="1E2A30"/>
                 </a:solidFill>
@@ -22706,7 +22706,7 @@
               </a:lnSpc>
             </a:pPr>
             <a:r>
-              <a:rPr sz="1900" b="0">
+              <a:rPr sz="1900" b="0" lang="ko-KR" altLang="en-US">
                 <a:solidFill>
                   <a:srgbClr val="1E2A30"/>
                 </a:solidFill>
@@ -22731,7 +22731,7 @@
               </a:lnSpc>
             </a:pPr>
             <a:r>
-              <a:rPr sz="1900" b="0">
+              <a:rPr sz="1900" b="0" lang="ko-KR" altLang="en-US">
                 <a:solidFill>
                   <a:srgbClr val="1E2A30"/>
                 </a:solidFill>
@@ -22742,7 +22742,7 @@
               <a:t>헷갈리면 </a:t>
             </a:r>
             <a:r>
-              <a:rPr sz="1900" b="0">
+              <a:rPr sz="1900" b="0" lang="ko-KR" altLang="en-US">
                 <a:solidFill>
                   <a:srgbClr val="B05C22"/>
                 </a:solidFill>
@@ -22753,7 +22753,7 @@
               <a:t>괄호</a:t>
             </a:r>
             <a:r>
-              <a:rPr sz="1900" b="0">
+              <a:rPr sz="1900" b="0" lang="ko-KR" altLang="en-US">
                 <a:solidFill>
                   <a:srgbClr val="1E2A30"/>
                 </a:solidFill>
@@ -22771,7 +22771,7 @@
               </a:lnSpc>
             </a:pPr>
             <a:r>
-              <a:rPr sz="1900" b="0">
+              <a:rPr sz="1900" b="0" lang="ko-KR" altLang="en-US">
                 <a:solidFill>
                   <a:srgbClr val="1E2A30"/>
                 </a:solidFill>
@@ -22858,7 +22858,7 @@
               </a:lnSpc>
             </a:pPr>
             <a:r>
-              <a:rPr sz="2600" b="0">
+              <a:rPr sz="2600" b="0" lang="ko-KR" altLang="en-US">
                 <a:solidFill>
                   <a:srgbClr val="C1662F"/>
                 </a:solidFill>
@@ -22899,7 +22899,7 @@
               </a:lnSpc>
             </a:pPr>
             <a:r>
-              <a:rPr sz="2700" b="0">
+              <a:rPr sz="2600" b="0" lang="ko-KR" altLang="en-US">
                 <a:solidFill>
                   <a:srgbClr val="1E2A30"/>
                 </a:solidFill>
@@ -22910,7 +22910,7 @@
               <a:t>표 3.2의 &lt;&gt;는 파이썬 2 유물 — 파이썬 3는 </a:t>
             </a:r>
             <a:r>
-              <a:rPr sz="2700" b="0">
+              <a:rPr sz="2600" b="0" lang="ko-KR" altLang="en-US">
                 <a:solidFill>
                   <a:srgbClr val="B05C22"/>
                 </a:solidFill>
@@ -22921,7 +22921,7 @@
               <a:t>!=만</a:t>
             </a:r>
             <a:r>
-              <a:rPr sz="2700" b="0">
+              <a:rPr sz="2600" b="0" lang="ko-KR" altLang="en-US">
                 <a:solidFill>
                   <a:srgbClr val="1E2A30"/>
                 </a:solidFill>
@@ -22939,7 +22939,7 @@
               </a:lnSpc>
             </a:pPr>
             <a:r>
-              <a:rPr sz="2700" b="0">
+              <a:rPr sz="2600" b="0" lang="ko-KR" altLang="en-US">
                 <a:solidFill>
                   <a:srgbClr val="1E2A30"/>
                 </a:solidFill>
@@ -22950,7 +22950,7 @@
               <a:t>멤버 연산 예시는 </a:t>
             </a:r>
             <a:r>
-              <a:rPr sz="2700" b="0">
+              <a:rPr sz="2600" b="0" lang="ko-KR" altLang="en-US">
                 <a:solidFill>
                   <a:srgbClr val="B05C22"/>
                 </a:solidFill>
@@ -22961,7 +22961,7 @@
               <a:t>4 in [1, 4, 5] → True</a:t>
             </a:r>
             <a:r>
-              <a:rPr sz="2700" b="0">
+              <a:rPr sz="2600" b="0" lang="ko-KR" altLang="en-US">
                 <a:solidFill>
                   <a:srgbClr val="1E2A30"/>
                 </a:solidFill>
@@ -23044,7 +23044,7 @@
               </a:lnSpc>
             </a:pPr>
             <a:r>
-              <a:rPr sz="2200" b="0">
+              <a:rPr sz="2200" b="0" lang="ko-KR" altLang="en-US">
                 <a:solidFill>
                   <a:srgbClr val="6B7A80"/>
                 </a:solidFill>
